--- a/public/slides/aa203/lecture_12.pptx
+++ b/public/slides/aa203/lecture_12.pptx
@@ -173,9 +173,58 @@
 <file path=ppt/revisionInfo.xml><?xml version="1.0" encoding="utf-8"?>
 <p1510:revInfo xmlns:a="http://schemas.openxmlformats.org/drawingml/2006/main" xmlns:r="http://schemas.openxmlformats.org/officeDocument/2006/relationships" xmlns:p1510="http://schemas.microsoft.com/office/powerpoint/2015/10/main">
   <p1510:revLst>
-    <p1510:client id="{33499EAE-5DE0-8943-B777-4E73869CFA02}" v="2" dt="2025-05-06T20:29:06.607"/>
+    <p1510:client id="{B3353957-0F77-7446-8214-02EAA243CF89}" v="1" dt="2026-08-13T21:18:45.353"/>
   </p1510:revLst>
 </p1510:revInfo>
+</file>
+
+<file path=ppt/changesInfos/changesInfo1.xml><?xml version="1.0" encoding="utf-8"?>
+<pc:chgInfo xmlns:a="http://schemas.openxmlformats.org/drawingml/2006/main" xmlns:r="http://schemas.openxmlformats.org/officeDocument/2006/relationships" xmlns:ac="http://schemas.microsoft.com/office/drawing/2013/main/command" xmlns:pc="http://schemas.microsoft.com/office/powerpoint/2013/main/command">
+  <pc:docChgLst>
+    <pc:chgData name="Daniele Gammelli" userId="292b8a31-f1ba-4b4c-b196-a231dc095d13" providerId="ADAL" clId="{6E670754-AB6A-5789-AA0A-6F6FD9CE3EEA}"/>
+    <pc:docChg chg="modSld">
+      <pc:chgData name="Daniele Gammelli" userId="292b8a31-f1ba-4b4c-b196-a231dc095d13" providerId="ADAL" clId="{6E670754-AB6A-5789-AA0A-6F6FD9CE3EEA}" dt="2026-08-13T21:18:50.676" v="4" actId="20577"/>
+      <pc:docMkLst>
+        <pc:docMk/>
+      </pc:docMkLst>
+      <pc:sldChg chg="modNotesTx">
+        <pc:chgData name="Daniele Gammelli" userId="292b8a31-f1ba-4b4c-b196-a231dc095d13" providerId="ADAL" clId="{6E670754-AB6A-5789-AA0A-6F6FD9CE3EEA}" dt="2026-08-13T21:18:33.569" v="0" actId="20577"/>
+        <pc:sldMkLst>
+          <pc:docMk/>
+          <pc:sldMk cId="3884100448" sldId="549"/>
+        </pc:sldMkLst>
+      </pc:sldChg>
+      <pc:sldChg chg="modNotesTx">
+        <pc:chgData name="Daniele Gammelli" userId="292b8a31-f1ba-4b4c-b196-a231dc095d13" providerId="ADAL" clId="{6E670754-AB6A-5789-AA0A-6F6FD9CE3EEA}" dt="2026-08-13T21:18:35.214" v="1" actId="20577"/>
+        <pc:sldMkLst>
+          <pc:docMk/>
+          <pc:sldMk cId="3011737641" sldId="551"/>
+        </pc:sldMkLst>
+      </pc:sldChg>
+      <pc:sldChg chg="modNotesTx">
+        <pc:chgData name="Daniele Gammelli" userId="292b8a31-f1ba-4b4c-b196-a231dc095d13" providerId="ADAL" clId="{6E670754-AB6A-5789-AA0A-6F6FD9CE3EEA}" dt="2026-08-13T21:18:37.586" v="2" actId="20577"/>
+        <pc:sldMkLst>
+          <pc:docMk/>
+          <pc:sldMk cId="966189162" sldId="552"/>
+        </pc:sldMkLst>
+      </pc:sldChg>
+      <pc:sldChg chg="modNotesTx">
+        <pc:chgData name="Daniele Gammelli" userId="292b8a31-f1ba-4b4c-b196-a231dc095d13" providerId="ADAL" clId="{6E670754-AB6A-5789-AA0A-6F6FD9CE3EEA}" dt="2026-08-13T21:18:43.424" v="3" actId="20577"/>
+        <pc:sldMkLst>
+          <pc:docMk/>
+          <pc:sldMk cId="3049139214" sldId="557"/>
+        </pc:sldMkLst>
+      </pc:sldChg>
+      <pc:sldChg chg="modNotesTx">
+        <pc:chgData name="Daniele Gammelli" userId="292b8a31-f1ba-4b4c-b196-a231dc095d13" providerId="ADAL" clId="{6E670754-AB6A-5789-AA0A-6F6FD9CE3EEA}" dt="2026-08-13T21:18:50.676" v="4" actId="20577"/>
+        <pc:sldMkLst>
+          <pc:docMk/>
+          <pc:sldMk cId="584605295" sldId="560"/>
+        </pc:sldMkLst>
+      </pc:sldChg>
+    </pc:docChg>
+  </pc:docChgLst>
+</pc:chgInfo>
 </file>
 
 <file path=ppt/notesMasters/notesMaster1.xml><?xml version="1.0" encoding="utf-8"?>
@@ -260,7 +309,7 @@
           <a:p>
             <a:fld id="{EBD6F028-2067-3740-AA48-A91E93570B1D}" type="datetimeFigureOut">
               <a:rPr lang="en-US" smtClean="0"/>
-              <a:t>5/5/26</a:t>
+              <a:t>8/13/26</a:t>
             </a:fld>
             <a:endParaRPr lang="en-US"/>
           </a:p>
@@ -659,140 +708,6 @@
               <a:buFont typeface="Arial" panose="020B0604020202020204" pitchFamily="34" charset="0"/>
               <a:buChar char="•"/>
             </a:pPr>
-            <a:r>
-              <a:rPr lang="en-US" dirty="0"/>
-              <a:t>Lyapunov functions help prove </a:t>
-            </a:r>
-            <a:r>
-              <a:rPr lang="en-US" b="1" dirty="0"/>
-              <a:t>stability without solving the system explicitly</a:t>
-            </a:r>
-            <a:r>
-              <a:rPr lang="en-US" dirty="0"/>
-              <a:t>, especially for nonlinear systems.</a:t>
-            </a:r>
-          </a:p>
-          <a:p>
-            <a:pPr marL="171450" indent="-171450">
-              <a:buFont typeface="Arial" panose="020B0604020202020204" pitchFamily="34" charset="0"/>
-              <a:buChar char="•"/>
-            </a:pPr>
-            <a:r>
-              <a:rPr lang="en-US" dirty="0"/>
-              <a:t>The </a:t>
-            </a:r>
-            <a:r>
-              <a:rPr lang="en-US" b="1" dirty="0"/>
-              <a:t>intuition</a:t>
-            </a:r>
-            <a:r>
-              <a:rPr lang="en-US" dirty="0"/>
-              <a:t> behind a </a:t>
-            </a:r>
-            <a:r>
-              <a:rPr lang="en-US" b="1" dirty="0"/>
-              <a:t>Lyapunov function</a:t>
-            </a:r>
-            <a:r>
-              <a:rPr lang="en-US" dirty="0"/>
-              <a:t> is that it acts like an </a:t>
-            </a:r>
-            <a:r>
-              <a:rPr lang="en-US" b="1" dirty="0"/>
-              <a:t>energy function</a:t>
-            </a:r>
-            <a:r>
-              <a:rPr lang="en-US" dirty="0"/>
-              <a:t> for a system, measuring how "far" the system is from equilibrium.</a:t>
-            </a:r>
-          </a:p>
-          <a:p>
-            <a:pPr>
-              <a:buNone/>
-            </a:pPr>
-            <a:r>
-              <a:rPr lang="en-US" dirty="0"/>
-              <a:t>Imagine placing a ball at the bottom of a bowl.</a:t>
-            </a:r>
-          </a:p>
-          <a:p>
-            <a:pPr>
-              <a:buNone/>
-            </a:pPr>
-            <a:r>
-              <a:rPr lang="en-US" dirty="0"/>
-              <a:t>The </a:t>
-            </a:r>
-            <a:r>
-              <a:rPr lang="en-US" b="1" dirty="0"/>
-              <a:t>bottom of the bowl</a:t>
-            </a:r>
-            <a:r>
-              <a:rPr lang="en-US" dirty="0"/>
-              <a:t> represents the </a:t>
-            </a:r>
-            <a:r>
-              <a:rPr lang="en-US" b="1" dirty="0"/>
-              <a:t>equilibrium point</a:t>
-            </a:r>
-            <a:r>
-              <a:rPr lang="en-US" dirty="0"/>
-              <a:t> (e.g., x=0x = 0x=0).</a:t>
-            </a:r>
-          </a:p>
-          <a:p>
-            <a:pPr>
-              <a:buNone/>
-            </a:pPr>
-            <a:r>
-              <a:rPr lang="en-US" dirty="0"/>
-              <a:t>The </a:t>
-            </a:r>
-            <a:r>
-              <a:rPr lang="en-US" b="1" dirty="0"/>
-              <a:t>height of the ball in the bowl</a:t>
-            </a:r>
-            <a:r>
-              <a:rPr lang="en-US" dirty="0"/>
-              <a:t> represents the value of the </a:t>
-            </a:r>
-            <a:r>
-              <a:rPr lang="en-US" b="1" dirty="0"/>
-              <a:t>Lyapunov function</a:t>
-            </a:r>
-            <a:r>
-              <a:rPr lang="en-US" dirty="0"/>
-              <a:t> V(x)V(x)V(x).</a:t>
-            </a:r>
-          </a:p>
-          <a:p>
-            <a:pPr>
-              <a:buNone/>
-            </a:pPr>
-            <a:r>
-              <a:rPr lang="en-US" dirty="0"/>
-              <a:t>As the ball rolls around, </a:t>
-            </a:r>
-            <a:r>
-              <a:rPr lang="en-US" b="1" dirty="0"/>
-              <a:t>energy is lost (e.g., due to friction)</a:t>
-            </a:r>
-            <a:r>
-              <a:rPr lang="en-US" dirty="0"/>
-              <a:t> and the ball moves toward the bottom.</a:t>
-            </a:r>
-          </a:p>
-          <a:p>
-            <a:r>
-              <a:rPr lang="en-US" dirty="0"/>
-              <a:t>If the height (i.e., V(x)) always decreases over time, the ball will eventually settle at the bottom.</a:t>
-            </a:r>
-          </a:p>
-          <a:p>
-            <a:pPr marL="171450" indent="-171450">
-              <a:buFont typeface="Arial" panose="020B0604020202020204" pitchFamily="34" charset="0"/>
-              <a:buChar char="•"/>
-            </a:pPr>
             <a:endParaRPr lang="en-US" dirty="0"/>
           </a:p>
         </p:txBody>
@@ -862,259 +777,25 @@
         </p:nvSpPr>
         <p:spPr/>
       </p:sp>
-      <mc:AlternateContent xmlns:mc="http://schemas.openxmlformats.org/markup-compatibility/2006">
-        <mc:Choice xmlns:a14="http://schemas.microsoft.com/office/drawing/2010/main" Requires="a14">
-          <p:sp>
-            <p:nvSpPr>
-              <p:cNvPr id="3" name="Notes Placeholder 2"/>
-              <p:cNvSpPr>
-                <a:spLocks noGrp="1"/>
-              </p:cNvSpPr>
-              <p:nvPr>
-                <p:ph type="body" idx="1"/>
-              </p:nvPr>
-            </p:nvSpPr>
-            <p:spPr/>
-            <p:txBody>
-              <a:bodyPr/>
-              <a:lstStyle/>
-              <a:p>
-                <a:r>
-                  <a:rPr lang="en-US" dirty="0"/>
-                  <a:t>This condition is a standard </a:t>
-                </a:r>
-                <a:r>
-                  <a:rPr lang="en-US" b="1" dirty="0"/>
-                  <a:t>terminal decrease (Lyapunov-like) condition</a:t>
-                </a:r>
-                <a:r>
-                  <a:rPr lang="en-US" dirty="0"/>
-                  <a:t> in Model Predictive Control (MPC).</a:t>
-                </a:r>
-              </a:p>
-              <a:p>
-                <a:endParaRPr lang="en-US" dirty="0"/>
-              </a:p>
-              <a:p>
-                <a:r>
-                  <a:rPr lang="en-US" dirty="0"/>
-                  <a:t>There exists a control </a:t>
-                </a:r>
-                <a14:m>
-                  <m:oMath xmlns:m="http://schemas.openxmlformats.org/officeDocument/2006/math">
-                    <m:r>
-                      <a:rPr lang="en-US" sz="1200" i="1" kern="1200">
-                        <a:solidFill>
-                          <a:schemeClr val="tx1"/>
-                        </a:solidFill>
-                        <a:latin typeface="+mn-lt"/>
-                        <a:ea typeface="+mn-ea"/>
-                        <a:cs typeface="+mn-cs"/>
-                      </a:rPr>
-                      <m:t>𝑢</m:t>
-                    </m:r>
-                  </m:oMath>
-                </a14:m>
-                <a:r>
-                  <a:rPr lang="en-US" dirty="0"/>
-                  <a:t>that keeps you in </a:t>
-                </a:r>
-                <a14:m>
-                  <m:oMath xmlns:m="http://schemas.openxmlformats.org/officeDocument/2006/math">
-                    <m:sSub>
-                      <m:sSubPr>
-                        <m:ctrlPr>
-                          <a:rPr lang="ar-AE" sz="1200" kern="1200">
-                            <a:solidFill>
-                              <a:schemeClr val="tx1"/>
-                            </a:solidFill>
-                            <a:latin typeface="+mn-lt"/>
-                            <a:ea typeface="+mn-ea"/>
-                            <a:cs typeface="+mn-cs"/>
-                          </a:rPr>
-                        </m:ctrlPr>
-                      </m:sSubPr>
-                      <m:e>
-                        <m:r>
-                          <a:rPr lang="ar-AE" sz="1200" i="1" kern="1200">
-                            <a:solidFill>
-                              <a:schemeClr val="tx1"/>
-                            </a:solidFill>
-                            <a:latin typeface="+mn-lt"/>
-                            <a:ea typeface="+mn-ea"/>
-                            <a:cs typeface="+mn-cs"/>
-                          </a:rPr>
-                          <m:t>𝑋</m:t>
-                        </m:r>
-                      </m:e>
-                      <m:sub>
-                        <m:r>
-                          <a:rPr lang="ar-AE" sz="1200" i="1" kern="1200">
-                            <a:solidFill>
-                              <a:schemeClr val="tx1"/>
-                            </a:solidFill>
-                            <a:latin typeface="+mn-lt"/>
-                            <a:ea typeface="+mn-ea"/>
-                            <a:cs typeface="+mn-cs"/>
-                          </a:rPr>
-                          <m:t>𝑓</m:t>
-                        </m:r>
-                      </m:sub>
-                    </m:sSub>
-                  </m:oMath>
-                </a14:m>
-                <a:r>
-                  <a:rPr lang="en-US" dirty="0"/>
-                  <a:t>and makes the “energy” </a:t>
-                </a:r>
-                <a14:m>
-                  <m:oMath xmlns:m="http://schemas.openxmlformats.org/officeDocument/2006/math">
-                    <m:r>
-                      <a:rPr lang="en-US" sz="1200" i="1" kern="1200">
-                        <a:solidFill>
-                          <a:schemeClr val="tx1"/>
-                        </a:solidFill>
-                        <a:latin typeface="+mn-lt"/>
-                        <a:ea typeface="+mn-ea"/>
-                        <a:cs typeface="+mn-cs"/>
-                      </a:rPr>
-                      <m:t>𝑝</m:t>
-                    </m:r>
-                    <m:d>
-                      <m:dPr>
-                        <m:ctrlPr>
-                          <a:rPr lang="ar-AE" sz="1200" i="1" kern="1200">
-                            <a:solidFill>
-                              <a:schemeClr val="tx1"/>
-                            </a:solidFill>
-                            <a:latin typeface="+mn-lt"/>
-                            <a:ea typeface="+mn-ea"/>
-                            <a:cs typeface="+mn-cs"/>
-                          </a:rPr>
-                        </m:ctrlPr>
-                      </m:dPr>
-                      <m:e>
-                        <m:r>
-                          <a:rPr lang="ar-AE" sz="1200" i="1" kern="1200">
-                            <a:solidFill>
-                              <a:schemeClr val="tx1"/>
-                            </a:solidFill>
-                            <a:latin typeface="+mn-lt"/>
-                            <a:ea typeface="+mn-ea"/>
-                            <a:cs typeface="+mn-cs"/>
-                          </a:rPr>
-                          <m:t>𝑥</m:t>
-                        </m:r>
-                      </m:e>
-                    </m:d>
-                  </m:oMath>
-                </a14:m>
-                <a:r>
-                  <a:rPr lang="en-US" dirty="0"/>
-                  <a:t>decrease by at least the stage cost.</a:t>
-                </a:r>
-              </a:p>
-            </p:txBody>
-          </p:sp>
-        </mc:Choice>
-        <mc:Fallback>
-          <p:sp>
-            <p:nvSpPr>
-              <p:cNvPr id="3" name="Notes Placeholder 2"/>
-              <p:cNvSpPr>
-                <a:spLocks noGrp="1"/>
-              </p:cNvSpPr>
-              <p:nvPr>
-                <p:ph type="body" idx="1"/>
-              </p:nvPr>
-            </p:nvSpPr>
-            <p:spPr/>
-            <p:txBody>
-              <a:bodyPr/>
-              <a:lstStyle/>
-              <a:p>
-                <a:r>
-                  <a:rPr lang="en-US" dirty="0"/>
-                  <a:t>This condition is a standard </a:t>
-                </a:r>
-                <a:r>
-                  <a:rPr lang="en-US" b="1" dirty="0"/>
-                  <a:t>terminal decrease (Lyapunov-like) condition</a:t>
-                </a:r>
-                <a:r>
-                  <a:rPr lang="en-US" dirty="0"/>
-                  <a:t> in Model Predictive Control (MPC).</a:t>
-                </a:r>
-              </a:p>
-              <a:p>
-                <a:endParaRPr lang="en-US" dirty="0"/>
-              </a:p>
-              <a:p>
-                <a:r>
-                  <a:rPr lang="en-US" dirty="0"/>
-                  <a:t>There exists a control </a:t>
-                </a:r>
-                <a:r>
-                  <a:rPr lang="en-US" sz="1200" i="0" kern="1200">
-                    <a:solidFill>
-                      <a:schemeClr val="tx1"/>
-                    </a:solidFill>
-                    <a:latin typeface="+mn-lt"/>
-                    <a:ea typeface="+mn-ea"/>
-                    <a:cs typeface="+mn-cs"/>
-                  </a:rPr>
-                  <a:t>𝑢</a:t>
-                </a:r>
-                <a:r>
-                  <a:rPr lang="en-US" dirty="0"/>
-                  <a:t>that keeps you in </a:t>
-                </a:r>
-                <a:r>
-                  <a:rPr lang="ar-AE" sz="1200" i="0" kern="1200">
-                    <a:solidFill>
-                      <a:schemeClr val="tx1"/>
-                    </a:solidFill>
-                    <a:latin typeface="+mn-lt"/>
-                    <a:ea typeface="+mn-ea"/>
-                    <a:cs typeface="+mn-cs"/>
-                  </a:rPr>
-                  <a:t>𝑋_𝑓</a:t>
-                </a:r>
-                <a:r>
-                  <a:rPr lang="en-US" dirty="0"/>
-                  <a:t>and makes the “energy” </a:t>
-                </a:r>
-                <a:r>
-                  <a:rPr lang="en-US" sz="1200" i="0" kern="1200">
-                    <a:solidFill>
-                      <a:schemeClr val="tx1"/>
-                    </a:solidFill>
-                    <a:latin typeface="+mn-lt"/>
-                    <a:ea typeface="+mn-ea"/>
-                    <a:cs typeface="+mn-cs"/>
-                  </a:rPr>
-                  <a:t>𝑝</a:t>
-                </a:r>
-                <a:r>
-                  <a:rPr lang="ar-AE" sz="1200" i="0" kern="1200">
-                    <a:solidFill>
-                      <a:schemeClr val="tx1"/>
-                    </a:solidFill>
-                    <a:latin typeface="+mn-lt"/>
-                    <a:ea typeface="+mn-ea"/>
-                    <a:cs typeface="+mn-cs"/>
-                  </a:rPr>
-                  <a:t>(𝑥)</a:t>
-                </a:r>
-                <a:r>
-                  <a:rPr lang="en-US" dirty="0"/>
-                  <a:t>decrease by at least the stage cost.</a:t>
-                </a:r>
-              </a:p>
-            </p:txBody>
-          </p:sp>
-        </mc:Fallback>
-      </mc:AlternateContent>
+      <p:sp>
+        <p:nvSpPr>
+          <p:cNvPr id="3" name="Notes Placeholder 2"/>
+          <p:cNvSpPr>
+            <a:spLocks noGrp="1"/>
+          </p:cNvSpPr>
+          <p:nvPr>
+            <p:ph type="body" idx="1"/>
+          </p:nvPr>
+        </p:nvSpPr>
+        <p:spPr/>
+        <p:txBody>
+          <a:bodyPr/>
+          <a:lstStyle/>
+          <a:p>
+            <a:endParaRPr lang="en-US" dirty="0"/>
+          </a:p>
+        </p:txBody>
+      </p:sp>
       <p:sp>
         <p:nvSpPr>
           <p:cNvPr id="4" name="Slide Number Placeholder 3"/>
@@ -1195,10 +876,7 @@
           <a:bodyPr/>
           <a:lstStyle/>
           <a:p>
-            <a:r>
-              <a:rPr lang="en-US" dirty="0"/>
-              <a:t>X0 is closed and bounded as it is the preimage of X-f (closed and bounded)</a:t>
-            </a:r>
+            <a:endParaRPr lang="en-US" dirty="0"/>
           </a:p>
         </p:txBody>
       </p:sp>
@@ -1282,74 +960,6 @@
           <a:bodyPr/>
           <a:lstStyle/>
           <a:p>
-            <a:pPr>
-              <a:buFont typeface="Arial" panose="020B0604020202020204" pitchFamily="34" charset="0"/>
-              <a:buChar char="•"/>
-            </a:pPr>
-            <a:r>
-              <a:rPr lang="en-US" dirty="0"/>
-              <a:t>If:</a:t>
-            </a:r>
-          </a:p>
-          <a:p>
-            <a:pPr marL="742950" lvl="1" indent="-285750">
-              <a:buFont typeface="Arial" panose="020B0604020202020204" pitchFamily="34" charset="0"/>
-              <a:buChar char="•"/>
-            </a:pPr>
-            <a:r>
-              <a:rPr lang="en-US" dirty="0"/>
-              <a:t>All eigenvalues of A lie </a:t>
-            </a:r>
-            <a:r>
-              <a:rPr lang="en-US" b="1" dirty="0"/>
-              <a:t>inside the unit circle</a:t>
-            </a:r>
-            <a:r>
-              <a:rPr lang="en-US" dirty="0"/>
-              <a:t>  </a:t>
-            </a:r>
-          </a:p>
-          <a:p>
-            <a:pPr marL="742950" lvl="1" indent="-285750">
-              <a:buFont typeface="Arial" panose="020B0604020202020204" pitchFamily="34" charset="0"/>
-              <a:buChar char="•"/>
-            </a:pPr>
-            <a:r>
-              <a:rPr lang="en-US" dirty="0"/>
-              <a:t>Q is </a:t>
-            </a:r>
-            <a:r>
-              <a:rPr lang="en-US" b="1" dirty="0"/>
-              <a:t>symmetric positive definite</a:t>
-            </a:r>
-            <a:r>
-              <a:rPr lang="en-US" dirty="0"/>
-              <a:t>,</a:t>
-            </a:r>
-          </a:p>
-          <a:p>
-            <a:r>
-              <a:rPr lang="en-US" dirty="0"/>
-              <a:t>✅ Then there exists a </a:t>
-            </a:r>
-            <a:r>
-              <a:rPr lang="en-US" b="1" dirty="0"/>
-              <a:t>unique</a:t>
-            </a:r>
-            <a:r>
-              <a:rPr lang="en-US" dirty="0"/>
-              <a:t> </a:t>
-            </a:r>
-            <a:r>
-              <a:rPr lang="en-US" b="1" dirty="0"/>
-              <a:t>symmetric positive definite</a:t>
-            </a:r>
-            <a:r>
-              <a:rPr lang="en-US" dirty="0"/>
-              <a:t> solution P.</a:t>
-            </a:r>
-          </a:p>
-          <a:p>
             <a:endParaRPr lang="en-US" dirty="0"/>
           </a:p>
         </p:txBody>
@@ -1419,8 +1029,8 @@
         </p:nvSpPr>
         <p:spPr/>
       </p:sp>
-      <mc:AlternateContent xmlns:mc="http://schemas.openxmlformats.org/markup-compatibility/2006">
-        <mc:Choice xmlns:a14="http://schemas.microsoft.com/office/drawing/2010/main" Requires="a14">
+      <mc:AlternateContent xmlns:mc="http://schemas.openxmlformats.org/markup-compatibility/2006" xmlns:a14="http://schemas.microsoft.com/office/drawing/2010/main">
+        <mc:Choice Requires="a14">
           <p:sp>
             <p:nvSpPr>
               <p:cNvPr id="3" name="Notes Placeholder 2"/>
@@ -1436,156 +1046,12 @@
               <a:bodyPr/>
               <a:lstStyle/>
               <a:p>
-                <a:r>
-                  <a:rPr lang="en-US" dirty="0"/>
-                  <a:t>“If I ever reach the terminal set </a:t>
-                </a:r>
-                <a14:m>
-                  <m:oMath xmlns:m="http://schemas.openxmlformats.org/officeDocument/2006/math">
-                    <m:sSub>
-                      <m:sSubPr>
-                        <m:ctrlPr>
-                          <a:rPr lang="ar-AE" sz="1200" kern="1200">
-                            <a:solidFill>
-                              <a:schemeClr val="tx1"/>
-                            </a:solidFill>
-                            <a:latin typeface="+mn-lt"/>
-                            <a:ea typeface="+mn-ea"/>
-                            <a:cs typeface="+mn-cs"/>
-                          </a:rPr>
-                        </m:ctrlPr>
-                      </m:sSubPr>
-                      <m:e>
-                        <m:r>
-                          <a:rPr lang="ar-AE" sz="1200" i="1" kern="1200">
-                            <a:solidFill>
-                              <a:schemeClr val="tx1"/>
-                            </a:solidFill>
-                            <a:latin typeface="+mn-lt"/>
-                            <a:ea typeface="+mn-ea"/>
-                            <a:cs typeface="+mn-cs"/>
-                          </a:rPr>
-                          <m:t>𝑋</m:t>
-                        </m:r>
-                      </m:e>
-                      <m:sub>
-                        <m:r>
-                          <a:rPr lang="ar-AE" sz="1200" i="1" kern="1200">
-                            <a:solidFill>
-                              <a:schemeClr val="tx1"/>
-                            </a:solidFill>
-                            <a:latin typeface="+mn-lt"/>
-                            <a:ea typeface="+mn-ea"/>
-                            <a:cs typeface="+mn-cs"/>
-                          </a:rPr>
-                          <m:t>𝑓</m:t>
-                        </m:r>
-                      </m:sub>
-                    </m:sSub>
-                  </m:oMath>
-                </a14:m>
-                <a:r>
-                  <a:rPr lang="ar-AE" dirty="0"/>
-                  <a:t>, </a:t>
-                </a:r>
-                <a:r>
-                  <a:rPr lang="en-US" dirty="0"/>
-                  <a:t>I must be able to stabilize the system from there onward.”</a:t>
-                </a:r>
-              </a:p>
-              <a:p>
-                <a:endParaRPr lang="en-US" dirty="0"/>
-              </a:p>
-              <a:p>
-                <a:r>
-                  <a:rPr lang="en-US" dirty="0"/>
-                  <a:t>You carve out a region </a:t>
-                </a:r>
-                <a14:m>
-                  <m:oMath xmlns:m="http://schemas.openxmlformats.org/officeDocument/2006/math">
-                    <m:sSub>
-                      <m:sSubPr>
-                        <m:ctrlPr>
-                          <a:rPr lang="ar-AE" sz="1200" kern="1200">
-                            <a:solidFill>
-                              <a:schemeClr val="tx1"/>
-                            </a:solidFill>
-                            <a:latin typeface="+mn-lt"/>
-                            <a:ea typeface="+mn-ea"/>
-                            <a:cs typeface="+mn-cs"/>
-                          </a:rPr>
-                        </m:ctrlPr>
-                      </m:sSubPr>
-                      <m:e>
-                        <m:r>
-                          <a:rPr lang="ar-AE" sz="1200" i="1" kern="1200">
-                            <a:solidFill>
-                              <a:schemeClr val="tx1"/>
-                            </a:solidFill>
-                            <a:latin typeface="+mn-lt"/>
-                            <a:ea typeface="+mn-ea"/>
-                            <a:cs typeface="+mn-cs"/>
-                          </a:rPr>
-                          <m:t>𝑋</m:t>
-                        </m:r>
-                      </m:e>
-                      <m:sub>
-                        <m:r>
-                          <a:rPr lang="ar-AE" sz="1200" i="1" kern="1200">
-                            <a:solidFill>
-                              <a:schemeClr val="tx1"/>
-                            </a:solidFill>
-                            <a:latin typeface="+mn-lt"/>
-                            <a:ea typeface="+mn-ea"/>
-                            <a:cs typeface="+mn-cs"/>
-                          </a:rPr>
-                          <m:t>𝑓</m:t>
-                        </m:r>
-                      </m:sub>
-                    </m:sSub>
-                  </m:oMath>
-                </a14:m>
-                <a:r>
-                  <a:rPr lang="en-US" dirty="0"/>
-                  <a:t>where the optimal unconstrained controller (LQR) is also constraint-feasible, and then use its value function as a Lyapunov function to guarantee stability.</a:t>
-                </a:r>
-              </a:p>
-              <a:p>
-                <a:endParaRPr lang="en-US" dirty="0"/>
-              </a:p>
-              <a:p>
-                <a:r>
-                  <a:rPr lang="en-US" dirty="0"/>
-                  <a:t>This is the set where:</a:t>
-                </a:r>
-              </a:p>
-              <a:p>
-                <a:r>
-                  <a:rPr lang="en-US" dirty="0"/>
-                  <a:t>“LQR is safe forever”</a:t>
-                </a:r>
-              </a:p>
-              <a:p>
-                <a:r>
-                  <a:rPr lang="en-US" dirty="0"/>
-                  <a:t>So it becomes a </a:t>
-                </a:r>
-                <a:r>
-                  <a:rPr lang="en-US" b="1" dirty="0"/>
-                  <a:t>terminal safe region</a:t>
-                </a:r>
-                <a:r>
-                  <a:rPr lang="en-US" dirty="0"/>
-                  <a:t> for MPC.</a:t>
-                </a:r>
-              </a:p>
-              <a:p>
                 <a:endParaRPr lang="en-US" dirty="0"/>
               </a:p>
             </p:txBody>
           </p:sp>
         </mc:Choice>
-        <mc:Fallback>
+        <mc:Fallback xmlns="">
           <p:sp>
             <p:nvSpPr>
               <p:cNvPr id="3" name="Notes Placeholder 2"/>
@@ -1765,101 +1231,6 @@
           <a:bodyPr/>
           <a:lstStyle/>
           <a:p>
-            <a:pPr marL="0" marR="0" lvl="0" indent="0" algn="l" defTabSz="914400" rtl="0" eaLnBrk="1" fontAlgn="auto" latinLnBrk="0" hangingPunct="1">
-              <a:lnSpc>
-                <a:spcPct val="100000"/>
-              </a:lnSpc>
-              <a:spcBef>
-                <a:spcPts val="0"/>
-              </a:spcBef>
-              <a:spcAft>
-                <a:spcPts val="0"/>
-              </a:spcAft>
-              <a:buClrTx/>
-              <a:buSzTx/>
-              <a:buFontTx/>
-              <a:buNone/>
-              <a:tabLst/>
-              <a:defRPr/>
-            </a:pPr>
-            <a:r>
-              <a:rPr lang="en-US" dirty="0" err="1"/>
-              <a:t>Constriants</a:t>
-            </a:r>
-            <a:r>
-              <a:rPr lang="en-US" dirty="0"/>
-              <a:t> are </a:t>
-            </a:r>
-            <a:r>
-              <a:rPr lang="en-US" sz="1800" dirty="0">
-                <a:effectLst/>
-                <a:latin typeface="CMR10"/>
-              </a:rPr>
-              <a:t>polyhedral region </a:t>
-            </a:r>
-          </a:p>
-          <a:p>
-            <a:pPr marL="0" marR="0" lvl="0" indent="0" algn="l" defTabSz="914400" rtl="0" eaLnBrk="1" fontAlgn="auto" latinLnBrk="0" hangingPunct="1">
-              <a:lnSpc>
-                <a:spcPct val="100000"/>
-              </a:lnSpc>
-              <a:spcBef>
-                <a:spcPts val="0"/>
-              </a:spcBef>
-              <a:spcAft>
-                <a:spcPts val="0"/>
-              </a:spcAft>
-              <a:buClrTx/>
-              <a:buSzTx/>
-              <a:buFontTx/>
-              <a:buNone/>
-              <a:tabLst/>
-              <a:defRPr/>
-            </a:pPr>
-            <a:r>
-              <a:rPr lang="en-US" sz="1800" dirty="0">
-                <a:effectLst/>
-                <a:latin typeface="CMR10"/>
-              </a:rPr>
-              <a:t>continuous piecewise affine function on </a:t>
-            </a:r>
-            <a:r>
-              <a:rPr lang="en-US" sz="1800" dirty="0" err="1">
-                <a:effectLst/>
-                <a:latin typeface="CMR10"/>
-              </a:rPr>
-              <a:t>polyhedra</a:t>
-            </a:r>
-            <a:r>
-              <a:rPr lang="en-US" sz="1800" dirty="0">
-                <a:effectLst/>
-                <a:latin typeface="CMR10"/>
-              </a:rPr>
-              <a:t> of the state </a:t>
-            </a:r>
-            <a:endParaRPr lang="en-US" dirty="0"/>
-          </a:p>
-          <a:p>
-            <a:pPr marL="0" marR="0" lvl="0" indent="0" algn="l" defTabSz="914400" rtl="0" eaLnBrk="1" fontAlgn="auto" latinLnBrk="0" hangingPunct="1">
-              <a:lnSpc>
-                <a:spcPct val="100000"/>
-              </a:lnSpc>
-              <a:spcBef>
-                <a:spcPts val="0"/>
-              </a:spcBef>
-              <a:spcAft>
-                <a:spcPts val="0"/>
-              </a:spcAft>
-              <a:buClrTx/>
-              <a:buSzTx/>
-              <a:buFontTx/>
-              <a:buNone/>
-              <a:tabLst/>
-              <a:defRPr/>
-            </a:pPr>
-            <a:endParaRPr lang="en-US" dirty="0"/>
-          </a:p>
-          <a:p>
             <a:endParaRPr lang="en-US" dirty="0"/>
           </a:p>
         </p:txBody>
@@ -2029,7 +1400,7 @@
           <a:p>
             <a:fld id="{D833C691-1343-5645-91EE-78347D72D507}" type="datetime1">
               <a:rPr lang="en-US" smtClean="0"/>
-              <a:t>5/5/26</a:t>
+              <a:t>8/13/26</a:t>
             </a:fld>
             <a:endParaRPr lang="en-US" dirty="0"/>
           </a:p>
@@ -2247,7 +1618,7 @@
           <a:p>
             <a:fld id="{C6DF125D-ED6E-1148-A4B8-B38876E74A6C}" type="datetime1">
               <a:rPr lang="en-US" smtClean="0"/>
-              <a:t>5/5/26</a:t>
+              <a:t>8/13/26</a:t>
             </a:fld>
             <a:endParaRPr lang="en-US"/>
           </a:p>
@@ -2429,7 +1800,7 @@
           <a:p>
             <a:fld id="{374DD0A1-B18F-3943-A9D4-F08E3D8F77E5}" type="datetime1">
               <a:rPr lang="en-US" smtClean="0"/>
-              <a:t>5/5/26</a:t>
+              <a:t>8/13/26</a:t>
             </a:fld>
             <a:endParaRPr lang="en-US"/>
           </a:p>
@@ -2637,7 +2008,7 @@
           <a:p>
             <a:fld id="{95397CD1-1640-1446-91A6-EA02203D1E02}" type="datetime1">
               <a:rPr lang="en-US" smtClean="0"/>
-              <a:t>5/5/26</a:t>
+              <a:t>8/13/26</a:t>
             </a:fld>
             <a:endParaRPr lang="en-US"/>
           </a:p>
@@ -2942,7 +2313,7 @@
           <a:p>
             <a:fld id="{96E7CA8D-D068-AF42-B7B9-36ABCD69CFF0}" type="datetime1">
               <a:rPr lang="en-US" smtClean="0"/>
-              <a:t>5/5/26</a:t>
+              <a:t>8/13/26</a:t>
             </a:fld>
             <a:endParaRPr lang="en-US"/>
           </a:p>
@@ -3175,7 +2546,7 @@
           <a:p>
             <a:fld id="{A75ABA7B-772A-3F48-9507-1EF0BF80D483}" type="datetime1">
               <a:rPr lang="en-US" smtClean="0"/>
-              <a:t>5/5/26</a:t>
+              <a:t>8/13/26</a:t>
             </a:fld>
             <a:endParaRPr lang="en-US"/>
           </a:p>
@@ -3543,7 +2914,7 @@
           <a:p>
             <a:fld id="{5DA4418B-0479-4241-9428-16D46A442CDB}" type="datetime1">
               <a:rPr lang="en-US" smtClean="0"/>
-              <a:t>5/5/26</a:t>
+              <a:t>8/13/26</a:t>
             </a:fld>
             <a:endParaRPr lang="en-US"/>
           </a:p>
@@ -3664,7 +3035,7 @@
           <a:p>
             <a:fld id="{51E73BF8-2D86-144C-AD79-0BFDB9303993}" type="datetime1">
               <a:rPr lang="en-US" smtClean="0"/>
-              <a:t>5/5/26</a:t>
+              <a:t>8/13/26</a:t>
             </a:fld>
             <a:endParaRPr lang="en-US"/>
           </a:p>
@@ -3763,7 +3134,7 @@
           <a:p>
             <a:fld id="{27D24717-97C7-9542-A6BD-B177D45A0403}" type="datetime1">
               <a:rPr lang="en-US" smtClean="0"/>
-              <a:t>5/5/26</a:t>
+              <a:t>8/13/26</a:t>
             </a:fld>
             <a:endParaRPr lang="en-US"/>
           </a:p>
@@ -4042,7 +3413,7 @@
           <a:p>
             <a:fld id="{38D73537-59C0-4748-A44E-4EA6D6237829}" type="datetime1">
               <a:rPr lang="en-US" smtClean="0"/>
-              <a:t>5/5/26</a:t>
+              <a:t>8/13/26</a:t>
             </a:fld>
             <a:endParaRPr lang="en-US"/>
           </a:p>
@@ -4298,7 +3669,7 @@
           <a:p>
             <a:fld id="{C3FF90C0-7D51-9A4C-96A7-73147946E946}" type="datetime1">
               <a:rPr lang="en-US" smtClean="0"/>
-              <a:t>5/5/26</a:t>
+              <a:t>8/13/26</a:t>
             </a:fld>
             <a:endParaRPr lang="en-US"/>
           </a:p>
@@ -4513,7 +3884,7 @@
           <a:p>
             <a:fld id="{BFBE2D0D-D8B6-4342-946C-DE69D5D0DF43}" type="datetime1">
               <a:rPr lang="en-US" smtClean="0"/>
-              <a:t>5/5/26</a:t>
+              <a:t>8/13/26</a:t>
             </a:fld>
             <a:endParaRPr lang="en-US"/>
           </a:p>
@@ -5190,7 +4561,7 @@
                     <m:sSup>
                       <m:sSupPr>
                         <m:ctrlPr>
-                          <a:rPr lang="en-US" i="1">
+                          <a:rPr lang="en-US" b="0" i="1" smtClean="0">
                             <a:latin typeface="Cambria Math" panose="02040503050406030204" pitchFamily="18" charset="0"/>
                           </a:rPr>
                         </m:ctrlPr>
@@ -5289,7 +4660,7 @@
                     <m:sSub>
                       <m:sSubPr>
                         <m:ctrlPr>
-                          <a:rPr lang="en-US" b="0" i="1" dirty="0" smtClean="0">
+                          <a:rPr lang="en-US" i="1" dirty="0" smtClean="0">
                             <a:latin typeface="Cambria Math" panose="02040503050406030204" pitchFamily="18" charset="0"/>
                           </a:rPr>
                         </m:ctrlPr>
@@ -5437,7 +4808,7 @@
                         <m:limLow>
                           <m:limLowPr>
                             <m:ctrlPr>
-                              <a:rPr lang="en-US" b="0" i="1" smtClean="0">
+                              <a:rPr lang="en-US" b="0" i="0" smtClean="0">
                                 <a:latin typeface="Cambria Math" panose="02040503050406030204" pitchFamily="18" charset="0"/>
                               </a:rPr>
                             </m:ctrlPr>
@@ -5512,13 +4883,7 @@
                               <a:rPr lang="en-US" b="1" i="0" smtClean="0">
                                 <a:latin typeface="Cambria Math" panose="02040503050406030204" pitchFamily="18" charset="0"/>
                               </a:rPr>
-                              <m:t> </m:t>
-                            </m:r>
-                            <m:r>
-                              <a:rPr lang="en-US" b="0" i="1" smtClean="0">
-                                <a:latin typeface="Cambria Math" panose="02040503050406030204" pitchFamily="18" charset="0"/>
-                              </a:rPr>
-                              <m:t>∈</m:t>
+                              <m:t> ∈</m:t>
                             </m:r>
                             <m:sSub>
                               <m:sSubPr>
@@ -5579,7 +4944,7 @@
                             <m:d>
                               <m:dPr>
                                 <m:ctrlPr>
-                                  <a:rPr lang="en-US" b="0" i="1" smtClean="0">
+                                  <a:rPr lang="en-US" b="1" i="0" smtClean="0">
                                     <a:latin typeface="Cambria Math" panose="02040503050406030204" pitchFamily="18" charset="0"/>
                                   </a:rPr>
                                 </m:ctrlPr>
@@ -5608,7 +4973,7 @@
                             <m:d>
                               <m:dPr>
                                 <m:ctrlPr>
-                                  <a:rPr lang="en-US" b="0" i="1" smtClean="0">
+                                  <a:rPr lang="en-US" b="1" i="0" smtClean="0">
                                     <a:latin typeface="Cambria Math" panose="02040503050406030204" pitchFamily="18" charset="0"/>
                                   </a:rPr>
                                 </m:ctrlPr>
@@ -5885,7 +5250,7 @@
           <a:p>
             <a:fld id="{86D3351E-4FF4-4E4B-AB57-C79C69DBFF5B}" type="datetime1">
               <a:rPr lang="en-US" smtClean="0"/>
-              <a:t>5/5/26</a:t>
+              <a:t>8/13/26</a:t>
             </a:fld>
             <a:endParaRPr lang="en-US"/>
           </a:p>
@@ -6199,7 +5564,7 @@
                     <m:sSub>
                       <m:sSubPr>
                         <m:ctrlPr>
-                          <a:rPr lang="en-US" i="1">
+                          <a:rPr lang="en-US" b="1">
                             <a:latin typeface="Cambria Math" panose="02040503050406030204" pitchFamily="18" charset="0"/>
                           </a:rPr>
                         </m:ctrlPr>
@@ -6239,7 +5604,7 @@
                     <m:d>
                       <m:dPr>
                         <m:ctrlPr>
-                          <a:rPr lang="en-US" b="1" i="1">
+                          <a:rPr lang="en-US" i="1">
                             <a:latin typeface="Cambria Math" panose="02040503050406030204" pitchFamily="18" charset="0"/>
                           </a:rPr>
                         </m:ctrlPr>
@@ -6273,7 +5638,7 @@
                     <m:sSub>
                       <m:sSubPr>
                         <m:ctrlPr>
-                          <a:rPr lang="en-US" i="1">
+                          <a:rPr lang="en-US" b="1">
                             <a:latin typeface="Cambria Math" panose="02040503050406030204" pitchFamily="18" charset="0"/>
                           </a:rPr>
                         </m:ctrlPr>
@@ -6301,7 +5666,7 @@
                     <m:d>
                       <m:dPr>
                         <m:ctrlPr>
-                          <a:rPr lang="en-US" i="1">
+                          <a:rPr lang="en-US" b="1" i="1" smtClean="0">
                             <a:latin typeface="Cambria Math" panose="02040503050406030204" pitchFamily="18" charset="0"/>
                           </a:rPr>
                         </m:ctrlPr>
@@ -6538,7 +5903,7 @@
                     <m:d>
                       <m:dPr>
                         <m:ctrlPr>
-                          <a:rPr lang="en-US" b="0" i="1" smtClean="0">
+                          <a:rPr lang="en-US" b="1" i="1" smtClean="0">
                             <a:latin typeface="Cambria Math" panose="02040503050406030204" pitchFamily="18" charset="0"/>
                           </a:rPr>
                         </m:ctrlPr>
@@ -6638,7 +6003,7 @@
           <a:p>
             <a:fld id="{8E7E6F98-C619-604C-AD40-21CD8CAF9861}" type="datetime1">
               <a:rPr lang="en-US" smtClean="0"/>
-              <a:t>5/5/26</a:t>
+              <a:t>8/13/26</a:t>
             </a:fld>
             <a:endParaRPr lang="en-US"/>
           </a:p>
@@ -6846,7 +6211,7 @@
                     <m:d>
                       <m:dPr>
                         <m:ctrlPr>
-                          <a:rPr lang="en-US" i="1">
+                          <a:rPr lang="en-US" b="1" i="0" smtClean="0">
                             <a:latin typeface="Cambria Math" panose="02040503050406030204" pitchFamily="18" charset="0"/>
                           </a:rPr>
                         </m:ctrlPr>
@@ -7116,7 +6481,7 @@
                     <m:sSubSup>
                       <m:sSubSupPr>
                         <m:ctrlPr>
-                          <a:rPr lang="en-US" b="0" i="1" smtClean="0">
+                          <a:rPr lang="en-US" b="1" i="0" smtClean="0">
                             <a:latin typeface="Cambria Math" panose="02040503050406030204" pitchFamily="18" charset="0"/>
                           </a:rPr>
                         </m:ctrlPr>
@@ -7168,7 +6533,7 @@
                     <m:sSubSup>
                       <m:sSubSupPr>
                         <m:ctrlPr>
-                          <a:rPr lang="en-US" i="1">
+                          <a:rPr lang="en-US" b="1" i="0">
                             <a:latin typeface="Cambria Math" panose="02040503050406030204" pitchFamily="18" charset="0"/>
                           </a:rPr>
                         </m:ctrlPr>
@@ -7220,7 +6585,7 @@
                     <m:sSubSup>
                       <m:sSubSupPr>
                         <m:ctrlPr>
-                          <a:rPr lang="en-US" i="1">
+                          <a:rPr lang="en-US" b="1" i="0">
                             <a:latin typeface="Cambria Math" panose="02040503050406030204" pitchFamily="18" charset="0"/>
                           </a:rPr>
                         </m:ctrlPr>
@@ -7313,7 +6678,7 @@
                     <m:sSubSup>
                       <m:sSubSupPr>
                         <m:ctrlPr>
-                          <a:rPr lang="en-US" i="1">
+                          <a:rPr lang="en-US" b="1" i="0" smtClean="0">
                             <a:latin typeface="Cambria Math" panose="02040503050406030204" pitchFamily="18" charset="0"/>
                           </a:rPr>
                         </m:ctrlPr>
@@ -7365,7 +6730,7 @@
                     <m:sSubSup>
                       <m:sSubSupPr>
                         <m:ctrlPr>
-                          <a:rPr lang="en-US" i="1" smtClean="0">
+                          <a:rPr lang="en-US" b="1" i="0" smtClean="0">
                             <a:latin typeface="Cambria Math" panose="02040503050406030204" pitchFamily="18" charset="0"/>
                           </a:rPr>
                         </m:ctrlPr>
@@ -7438,7 +6803,7 @@
                     <m:sSubSup>
                       <m:sSubSupPr>
                         <m:ctrlPr>
-                          <a:rPr lang="en-US" i="1">
+                          <a:rPr lang="en-US" b="1">
                             <a:latin typeface="Cambria Math" panose="02040503050406030204" pitchFamily="18" charset="0"/>
                           </a:rPr>
                         </m:ctrlPr>
@@ -7565,7 +6930,7 @@
                     <m:sSubSup>
                       <m:sSubSupPr>
                         <m:ctrlPr>
-                          <a:rPr lang="en-US" i="1">
+                          <a:rPr lang="en-US" b="1">
                             <a:latin typeface="Cambria Math" panose="02040503050406030204" pitchFamily="18" charset="0"/>
                           </a:rPr>
                         </m:ctrlPr>
@@ -7635,7 +7000,7 @@
                     <m:sSubSup>
                       <m:sSubSupPr>
                         <m:ctrlPr>
-                          <a:rPr lang="en-US" i="1">
+                          <a:rPr lang="en-US" b="1">
                             <a:latin typeface="Cambria Math" panose="02040503050406030204" pitchFamily="18" charset="0"/>
                           </a:rPr>
                         </m:ctrlPr>
@@ -7687,7 +7052,7 @@
                     <m:sSubSup>
                       <m:sSubSupPr>
                         <m:ctrlPr>
-                          <a:rPr lang="en-US" i="1">
+                          <a:rPr lang="en-US" b="1">
                             <a:latin typeface="Cambria Math" panose="02040503050406030204" pitchFamily="18" charset="0"/>
                           </a:rPr>
                         </m:ctrlPr>
@@ -7739,7 +7104,7 @@
                     <m:sSubSup>
                       <m:sSubSupPr>
                         <m:ctrlPr>
-                          <a:rPr lang="en-US" i="1">
+                          <a:rPr lang="en-US" b="1">
                             <a:latin typeface="Cambria Math" panose="02040503050406030204" pitchFamily="18" charset="0"/>
                           </a:rPr>
                         </m:ctrlPr>
@@ -7885,7 +7250,7 @@
                     <m:sSubSup>
                       <m:sSubSupPr>
                         <m:ctrlPr>
-                          <a:rPr lang="en-US" i="1">
+                          <a:rPr lang="en-US" b="1">
                             <a:latin typeface="Cambria Math" panose="02040503050406030204" pitchFamily="18" charset="0"/>
                           </a:rPr>
                         </m:ctrlPr>
@@ -7937,7 +7302,7 @@
                     <m:sSubSup>
                       <m:sSubSupPr>
                         <m:ctrlPr>
-                          <a:rPr lang="en-US" i="1">
+                          <a:rPr lang="en-US" b="1">
                             <a:latin typeface="Cambria Math" panose="02040503050406030204" pitchFamily="18" charset="0"/>
                           </a:rPr>
                         </m:ctrlPr>
@@ -7995,7 +7360,7 @@
                     <m:sSubSup>
                       <m:sSubSupPr>
                         <m:ctrlPr>
-                          <a:rPr lang="en-US" i="1">
+                          <a:rPr lang="en-US" b="1">
                             <a:latin typeface="Cambria Math" panose="02040503050406030204" pitchFamily="18" charset="0"/>
                           </a:rPr>
                         </m:ctrlPr>
@@ -8142,7 +7507,7 @@
           <a:p>
             <a:fld id="{70748A7C-801E-854B-B4F3-FA2702C29E2C}" type="datetime1">
               <a:rPr lang="en-US" smtClean="0"/>
-              <a:t>5/5/26</a:t>
+              <a:t>8/13/26</a:t>
             </a:fld>
             <a:endParaRPr lang="en-US"/>
           </a:p>
@@ -8307,7 +7672,7 @@
                     <m:sSubSup>
                       <m:sSubSupPr>
                         <m:ctrlPr>
-                          <a:rPr lang="en-US" i="1">
+                          <a:rPr lang="en-US" b="1">
                             <a:latin typeface="Cambria Math" panose="02040503050406030204" pitchFamily="18" charset="0"/>
                           </a:rPr>
                         </m:ctrlPr>
@@ -8433,10 +7798,7 @@
                 </a:pPr>
                 <a14:m>
                   <m:oMathPara xmlns:m="http://schemas.openxmlformats.org/officeDocument/2006/math">
-                    <m:oMathParaPr>
-                      <m:jc m:val="centerGroup"/>
-                    </m:oMathParaPr>
-                    <m:oMath xmlns:m="http://schemas.openxmlformats.org/officeDocument/2006/math">
+                    <m:oMath>
                       <m:r>
                         <a:rPr lang="en-US" b="0" i="1" smtClean="0">
                           <a:latin typeface="Cambria Math" panose="02040503050406030204" pitchFamily="18" charset="0"/>
@@ -8447,7 +7809,7 @@
                         <m:accPr>
                           <m:chr m:val="̅"/>
                           <m:ctrlPr>
-                            <a:rPr lang="en-US" b="0" i="1" smtClean="0">
+                            <a:rPr lang="en-US" b="1" i="0" smtClean="0">
                               <a:latin typeface="Cambria Math" panose="02040503050406030204" pitchFamily="18" charset="0"/>
                             </a:rPr>
                           </m:ctrlPr>
@@ -8518,7 +7880,7 @@
                       <m:sSubSup>
                         <m:sSubSupPr>
                           <m:ctrlPr>
-                            <a:rPr lang="en-US" i="1">
+                            <a:rPr lang="en-US" b="1">
                               <a:latin typeface="Cambria Math" panose="02040503050406030204" pitchFamily="18" charset="0"/>
                             </a:rPr>
                           </m:ctrlPr>
@@ -8577,7 +7939,7 @@
                         <m:accPr>
                           <m:chr m:val="̅"/>
                           <m:ctrlPr>
-                            <a:rPr lang="en-US" i="1">
+                            <a:rPr lang="en-US" b="1">
                               <a:latin typeface="Cambria Math" panose="02040503050406030204" pitchFamily="18" charset="0"/>
                             </a:rPr>
                           </m:ctrlPr>
@@ -8645,7 +8007,7 @@
                       <m:accPr>
                         <m:chr m:val="̅"/>
                         <m:ctrlPr>
-                          <a:rPr lang="en-US" i="1">
+                          <a:rPr lang="en-US" b="1">
                             <a:latin typeface="Cambria Math" panose="02040503050406030204" pitchFamily="18" charset="0"/>
                           </a:rPr>
                         </m:ctrlPr>
@@ -8679,7 +8041,7 @@
                     <m:sSubSup>
                       <m:sSubSupPr>
                         <m:ctrlPr>
-                          <a:rPr lang="en-US" i="1">
+                          <a:rPr lang="en-US" b="1">
                             <a:latin typeface="Cambria Math" panose="02040503050406030204" pitchFamily="18" charset="0"/>
                           </a:rPr>
                         </m:ctrlPr>
@@ -8731,7 +8093,7 @@
                     <m:sSubSup>
                       <m:sSubSupPr>
                         <m:ctrlPr>
-                          <a:rPr lang="en-US" i="1">
+                          <a:rPr lang="en-US" b="1">
                             <a:latin typeface="Cambria Math" panose="02040503050406030204" pitchFamily="18" charset="0"/>
                           </a:rPr>
                         </m:ctrlPr>
@@ -8783,7 +8145,7 @@
                     <m:sSubSup>
                       <m:sSubSupPr>
                         <m:ctrlPr>
-                          <a:rPr lang="en-US" i="1">
+                          <a:rPr lang="en-US" b="1">
                             <a:latin typeface="Cambria Math" panose="02040503050406030204" pitchFamily="18" charset="0"/>
                           </a:rPr>
                         </m:ctrlPr>
@@ -8842,7 +8204,7 @@
                       <m:accPr>
                         <m:chr m:val="̅"/>
                         <m:ctrlPr>
-                          <a:rPr lang="en-US" i="1">
+                          <a:rPr lang="en-US" b="1">
                             <a:latin typeface="Cambria Math" panose="02040503050406030204" pitchFamily="18" charset="0"/>
                           </a:rPr>
                         </m:ctrlPr>
@@ -8921,10 +8283,7 @@
                 </a:pPr>
                 <a14:m>
                   <m:oMathPara xmlns:m="http://schemas.openxmlformats.org/officeDocument/2006/math">
-                    <m:oMathParaPr>
-                      <m:jc m:val="centerGroup"/>
-                    </m:oMathParaPr>
-                    <m:oMath xmlns:m="http://schemas.openxmlformats.org/officeDocument/2006/math">
+                    <m:oMath>
                       <m:sSubSup>
                         <m:sSubSupPr>
                           <m:ctrlPr>
@@ -8961,7 +8320,7 @@
                       <m:d>
                         <m:dPr>
                           <m:ctrlPr>
-                            <a:rPr lang="en-US" b="0" i="1" smtClean="0">
+                            <a:rPr lang="en-US" b="1" i="0" smtClean="0">
                               <a:latin typeface="Cambria Math" panose="02040503050406030204" pitchFamily="18" charset="0"/>
                             </a:rPr>
                           </m:ctrlPr>
@@ -9007,7 +8366,7 @@
                       <m:d>
                         <m:dPr>
                           <m:ctrlPr>
-                            <a:rPr lang="en-US" b="0" i="1" smtClean="0">
+                            <a:rPr lang="en-US" i="1">
                               <a:latin typeface="Cambria Math" panose="02040503050406030204" pitchFamily="18" charset="0"/>
                             </a:rPr>
                           </m:ctrlPr>
@@ -9022,7 +8381,7 @@
                           <m:sSubSup>
                             <m:sSubSupPr>
                               <m:ctrlPr>
-                                <a:rPr lang="en-US" i="1">
+                                <a:rPr lang="en-US" b="1">
                                   <a:latin typeface="Cambria Math" panose="02040503050406030204" pitchFamily="18" charset="0"/>
                                 </a:rPr>
                               </m:ctrlPr>
@@ -9081,7 +8440,7 @@
                             <m:accPr>
                               <m:chr m:val="̅"/>
                               <m:ctrlPr>
-                                <a:rPr lang="en-US" i="1">
+                                <a:rPr lang="en-US" b="1">
                                   <a:latin typeface="Cambria Math" panose="02040503050406030204" pitchFamily="18" charset="0"/>
                                 </a:rPr>
                               </m:ctrlPr>
@@ -9162,7 +8521,7 @@
                               <m:sSubSup>
                                 <m:sSubSupPr>
                                   <m:ctrlPr>
-                                    <a:rPr lang="en-US" b="0" i="1" smtClean="0">
+                                    <a:rPr lang="en-US" b="1" i="0" smtClean="0">
                                       <a:latin typeface="Cambria Math" panose="02040503050406030204" pitchFamily="18" charset="0"/>
                                     </a:rPr>
                                   </m:ctrlPr>
@@ -9214,7 +8573,7 @@
                               <m:sSubSup>
                                 <m:sSubSupPr>
                                   <m:ctrlPr>
-                                    <a:rPr lang="en-US" b="0" i="1" smtClean="0">
+                                    <a:rPr lang="en-US" b="1" i="0" smtClean="0">
                                       <a:latin typeface="Cambria Math" panose="02040503050406030204" pitchFamily="18" charset="0"/>
                                     </a:rPr>
                                   </m:ctrlPr>
@@ -9285,7 +8644,7 @@
                           <m:sSubSup>
                             <m:sSubSupPr>
                               <m:ctrlPr>
-                                <a:rPr lang="en-US" i="1">
+                                <a:rPr lang="en-US" b="1">
                                   <a:latin typeface="Cambria Math" panose="02040503050406030204" pitchFamily="18" charset="0"/>
                                 </a:rPr>
                               </m:ctrlPr>
@@ -9338,7 +8697,7 @@
                             <m:accPr>
                               <m:chr m:val="̅"/>
                               <m:ctrlPr>
-                                <a:rPr lang="en-US" i="1">
+                                <a:rPr lang="en-US" b="1">
                                   <a:latin typeface="Cambria Math" panose="02040503050406030204" pitchFamily="18" charset="0"/>
                                 </a:rPr>
                               </m:ctrlPr>
@@ -9432,7 +8791,7 @@
           <a:p>
             <a:fld id="{DB135102-1C11-C94A-A3B4-FA6F4FA4BABA}" type="datetime1">
               <a:rPr lang="en-US" smtClean="0"/>
-              <a:t>5/5/26</a:t>
+              <a:t>8/13/26</a:t>
             </a:fld>
             <a:endParaRPr lang="en-US"/>
           </a:p>
@@ -9597,7 +8956,7 @@
                     <m:sSubSup>
                       <m:sSubSupPr>
                         <m:ctrlPr>
-                          <a:rPr lang="en-US" i="1">
+                          <a:rPr lang="en-US" b="1">
                             <a:latin typeface="Cambria Math" panose="02040503050406030204" pitchFamily="18" charset="0"/>
                           </a:rPr>
                         </m:ctrlPr>
@@ -9723,10 +9082,7 @@
                 </a:pPr>
                 <a14:m>
                   <m:oMathPara xmlns:m="http://schemas.openxmlformats.org/officeDocument/2006/math">
-                    <m:oMathParaPr>
-                      <m:jc m:val="centerGroup"/>
-                    </m:oMathParaPr>
-                    <m:oMath xmlns:m="http://schemas.openxmlformats.org/officeDocument/2006/math">
+                    <m:oMath>
                       <m:r>
                         <a:rPr lang="en-US" b="0" i="1" smtClean="0">
                           <a:latin typeface="Cambria Math" panose="02040503050406030204" pitchFamily="18" charset="0"/>
@@ -9737,7 +9093,7 @@
                         <m:accPr>
                           <m:chr m:val="̅"/>
                           <m:ctrlPr>
-                            <a:rPr lang="en-US" b="0" i="1" smtClean="0">
+                            <a:rPr lang="en-US" b="1" i="0" smtClean="0">
                               <a:latin typeface="Cambria Math" panose="02040503050406030204" pitchFamily="18" charset="0"/>
                             </a:rPr>
                           </m:ctrlPr>
@@ -9808,7 +9164,7 @@
                       <m:sSubSup>
                         <m:sSubSupPr>
                           <m:ctrlPr>
-                            <a:rPr lang="en-US" i="1">
+                            <a:rPr lang="en-US" b="1">
                               <a:latin typeface="Cambria Math" panose="02040503050406030204" pitchFamily="18" charset="0"/>
                             </a:rPr>
                           </m:ctrlPr>
@@ -9867,7 +9223,7 @@
                         <m:accPr>
                           <m:chr m:val="̅"/>
                           <m:ctrlPr>
-                            <a:rPr lang="en-US" i="1">
+                            <a:rPr lang="en-US" b="1">
                               <a:latin typeface="Cambria Math" panose="02040503050406030204" pitchFamily="18" charset="0"/>
                             </a:rPr>
                           </m:ctrlPr>
@@ -9935,7 +9291,7 @@
                       <m:accPr>
                         <m:chr m:val="̅"/>
                         <m:ctrlPr>
-                          <a:rPr lang="en-US" i="1">
+                          <a:rPr lang="en-US" b="1">
                             <a:latin typeface="Cambria Math" panose="02040503050406030204" pitchFamily="18" charset="0"/>
                           </a:rPr>
                         </m:ctrlPr>
@@ -9969,7 +9325,7 @@
                     <m:sSubSup>
                       <m:sSubSupPr>
                         <m:ctrlPr>
-                          <a:rPr lang="en-US" i="1">
+                          <a:rPr lang="en-US" b="1">
                             <a:latin typeface="Cambria Math" panose="02040503050406030204" pitchFamily="18" charset="0"/>
                           </a:rPr>
                         </m:ctrlPr>
@@ -10021,7 +9377,7 @@
                     <m:sSubSup>
                       <m:sSubSupPr>
                         <m:ctrlPr>
-                          <a:rPr lang="en-US" i="1">
+                          <a:rPr lang="en-US" b="1">
                             <a:latin typeface="Cambria Math" panose="02040503050406030204" pitchFamily="18" charset="0"/>
                           </a:rPr>
                         </m:ctrlPr>
@@ -10073,7 +9429,7 @@
                     <m:sSubSup>
                       <m:sSubSupPr>
                         <m:ctrlPr>
-                          <a:rPr lang="en-US" i="1">
+                          <a:rPr lang="en-US" b="1">
                             <a:latin typeface="Cambria Math" panose="02040503050406030204" pitchFamily="18" charset="0"/>
                           </a:rPr>
                         </m:ctrlPr>
@@ -10132,7 +9488,7 @@
                       <m:accPr>
                         <m:chr m:val="̅"/>
                         <m:ctrlPr>
-                          <a:rPr lang="en-US" i="1">
+                          <a:rPr lang="en-US" b="1">
                             <a:latin typeface="Cambria Math" panose="02040503050406030204" pitchFamily="18" charset="0"/>
                           </a:rPr>
                         </m:ctrlPr>
@@ -10211,10 +9567,7 @@
                 </a:pPr>
                 <a14:m>
                   <m:oMathPara xmlns:m="http://schemas.openxmlformats.org/officeDocument/2006/math">
-                    <m:oMathParaPr>
-                      <m:jc m:val="centerGroup"/>
-                    </m:oMathParaPr>
-                    <m:oMath xmlns:m="http://schemas.openxmlformats.org/officeDocument/2006/math">
+                    <m:oMath>
                       <m:sSubSup>
                         <m:sSubSupPr>
                           <m:ctrlPr>
@@ -10251,7 +9604,7 @@
                       <m:d>
                         <m:dPr>
                           <m:ctrlPr>
-                            <a:rPr lang="en-US" b="0" i="1" smtClean="0">
+                            <a:rPr lang="en-US" b="1" i="0" smtClean="0">
                               <a:latin typeface="Cambria Math" panose="02040503050406030204" pitchFamily="18" charset="0"/>
                             </a:rPr>
                           </m:ctrlPr>
@@ -10297,7 +9650,7 @@
                       <m:d>
                         <m:dPr>
                           <m:ctrlPr>
-                            <a:rPr lang="en-US" b="0" i="1" smtClean="0">
+                            <a:rPr lang="en-US" i="1">
                               <a:latin typeface="Cambria Math" panose="02040503050406030204" pitchFamily="18" charset="0"/>
                             </a:rPr>
                           </m:ctrlPr>
@@ -10312,7 +9665,7 @@
                           <m:sSubSup>
                             <m:sSubSupPr>
                               <m:ctrlPr>
-                                <a:rPr lang="en-US" i="1">
+                                <a:rPr lang="en-US" b="1">
                                   <a:latin typeface="Cambria Math" panose="02040503050406030204" pitchFamily="18" charset="0"/>
                                 </a:rPr>
                               </m:ctrlPr>
@@ -10371,7 +9724,7 @@
                             <m:accPr>
                               <m:chr m:val="̅"/>
                               <m:ctrlPr>
-                                <a:rPr lang="en-US" i="1">
+                                <a:rPr lang="en-US" b="1">
                                   <a:latin typeface="Cambria Math" panose="02040503050406030204" pitchFamily="18" charset="0"/>
                                 </a:rPr>
                               </m:ctrlPr>
@@ -10473,7 +9826,7 @@
                               <m:sSubSup>
                                 <m:sSubSupPr>
                                   <m:ctrlPr>
-                                    <a:rPr lang="en-US" b="0" i="1" smtClean="0">
+                                    <a:rPr lang="en-US" b="1" i="0" smtClean="0">
                                       <a:solidFill>
                                         <a:srgbClr val="C00000"/>
                                       </a:solidFill>
@@ -10543,7 +9896,7 @@
                               <m:sSubSup>
                                 <m:sSubSupPr>
                                   <m:ctrlPr>
-                                    <a:rPr lang="en-US" b="0" i="1" smtClean="0">
+                                    <a:rPr lang="en-US" b="1" i="0" smtClean="0">
                                       <a:solidFill>
                                         <a:srgbClr val="C00000"/>
                                       </a:solidFill>
@@ -10620,7 +9973,7 @@
                       <m:d>
                         <m:dPr>
                           <m:ctrlPr>
-                            <a:rPr lang="en-US" b="0" i="1" smtClean="0">
+                            <a:rPr lang="en-US" i="1">
                               <a:latin typeface="Cambria Math" panose="02040503050406030204" pitchFamily="18" charset="0"/>
                             </a:rPr>
                           </m:ctrlPr>
@@ -10629,7 +9982,7 @@
                           <m:sSubSup>
                             <m:sSubSupPr>
                               <m:ctrlPr>
-                                <a:rPr lang="en-US" i="1">
+                                <a:rPr lang="en-US" b="1">
                                   <a:latin typeface="Cambria Math" panose="02040503050406030204" pitchFamily="18" charset="0"/>
                                 </a:rPr>
                               </m:ctrlPr>
@@ -10682,7 +10035,7 @@
                             <m:accPr>
                               <m:chr m:val="̅"/>
                               <m:ctrlPr>
-                                <a:rPr lang="en-US" i="1">
+                                <a:rPr lang="en-US" b="1">
                                   <a:latin typeface="Cambria Math" panose="02040503050406030204" pitchFamily="18" charset="0"/>
                                 </a:rPr>
                               </m:ctrlPr>
@@ -10725,7 +10078,7 @@
                     <m:d>
                       <m:dPr>
                         <m:ctrlPr>
-                          <a:rPr lang="en-US" b="0" i="1" smtClean="0">
+                          <a:rPr lang="en-US" i="1">
                             <a:solidFill>
                               <a:srgbClr val="C00000"/>
                             </a:solidFill>
@@ -10737,7 +10090,7 @@
                         <m:sSubSup>
                           <m:sSubSupPr>
                             <m:ctrlPr>
-                              <a:rPr lang="en-US" i="1">
+                              <a:rPr lang="en-US" b="1">
                                 <a:solidFill>
                                   <a:srgbClr val="C00000"/>
                                 </a:solidFill>
@@ -10821,7 +10174,7 @@
                         <m:sSubSup>
                           <m:sSubSupPr>
                             <m:ctrlPr>
-                              <a:rPr lang="en-US" i="1">
+                              <a:rPr lang="en-US" b="1">
                                 <a:latin typeface="Cambria Math" panose="02040503050406030204" pitchFamily="18" charset="0"/>
                               </a:rPr>
                             </m:ctrlPr>
@@ -10884,28 +10237,28 @@
                     <m:d>
                       <m:dPr>
                         <m:ctrlPr>
-                          <a:rPr lang="en-US" b="0" i="1" smtClean="0">
-                            <a:solidFill>
-                              <a:srgbClr val="C00000"/>
-                            </a:solidFill>
-                            <a:latin typeface="Cambria Math" panose="02040503050406030204" pitchFamily="18" charset="0"/>
-                          </a:rPr>
-                        </m:ctrlPr>
-                      </m:dPr>
-                      <m:e>
-                        <m:r>
                           <a:rPr lang="en-US" b="1" i="0" smtClean="0">
                             <a:solidFill>
                               <a:srgbClr val="C00000"/>
                             </a:solidFill>
                             <a:latin typeface="Cambria Math" panose="02040503050406030204" pitchFamily="18" charset="0"/>
                           </a:rPr>
+                        </m:ctrlPr>
+                      </m:dPr>
+                      <m:e>
+                        <m:r>
+                          <a:rPr lang="en-US" b="1" i="0" smtClean="0">
+                            <a:solidFill>
+                              <a:srgbClr val="C00000"/>
+                            </a:solidFill>
+                            <a:latin typeface="Cambria Math" panose="02040503050406030204" pitchFamily="18" charset="0"/>
+                          </a:rPr>
                           <m:t>𝐱</m:t>
                         </m:r>
                         <m:d>
                           <m:dPr>
                             <m:ctrlPr>
-                              <a:rPr lang="en-US" b="0" i="1" smtClean="0">
+                              <a:rPr lang="en-US" b="0" i="0" smtClean="0">
                                 <a:solidFill>
                                   <a:srgbClr val="C00000"/>
                                 </a:solidFill>
@@ -10937,7 +10290,7 @@
                         <m:sSubSup>
                           <m:sSubSupPr>
                             <m:ctrlPr>
-                              <a:rPr lang="en-US" i="1">
+                              <a:rPr lang="en-US" b="1">
                                 <a:solidFill>
                                   <a:srgbClr val="C00000"/>
                                 </a:solidFill>
@@ -11012,7 +10365,7 @@
                     <m:d>
                       <m:dPr>
                         <m:ctrlPr>
-                          <a:rPr lang="en-US" i="1">
+                          <a:rPr lang="en-US" b="1">
                             <a:latin typeface="Cambria Math" panose="02040503050406030204" pitchFamily="18" charset="0"/>
                           </a:rPr>
                         </m:ctrlPr>
@@ -11039,7 +10392,7 @@
                         <m:sSubSup>
                           <m:sSubSupPr>
                             <m:ctrlPr>
-                              <a:rPr lang="en-US" i="1">
+                              <a:rPr lang="en-US" b="1">
                                 <a:latin typeface="Cambria Math" panose="02040503050406030204" pitchFamily="18" charset="0"/>
                               </a:rPr>
                             </m:ctrlPr>
@@ -11168,7 +10521,7 @@
           <a:p>
             <a:fld id="{28253EDD-9195-044E-82C3-3E0E9FBFE63D}" type="datetime1">
               <a:rPr lang="en-US" smtClean="0"/>
-              <a:t>5/5/26</a:t>
+              <a:t>8/13/26</a:t>
             </a:fld>
             <a:endParaRPr lang="en-US"/>
           </a:p>
@@ -11335,10 +10688,7 @@
                 </a:pPr>
                 <a14:m>
                   <m:oMathPara xmlns:m="http://schemas.openxmlformats.org/officeDocument/2006/math">
-                    <m:oMathParaPr>
-                      <m:jc m:val="centerGroup"/>
-                    </m:oMathParaPr>
-                    <m:oMath xmlns:m="http://schemas.openxmlformats.org/officeDocument/2006/math">
+                    <m:oMath>
                       <m:sSubSup>
                         <m:sSubSupPr>
                           <m:ctrlPr>
@@ -11375,7 +10725,7 @@
                       <m:d>
                         <m:dPr>
                           <m:ctrlPr>
-                            <a:rPr lang="en-US" i="1">
+                            <a:rPr lang="en-US" b="1" i="0">
                               <a:latin typeface="Cambria Math" panose="02040503050406030204" pitchFamily="18" charset="0"/>
                             </a:rPr>
                           </m:ctrlPr>
@@ -11445,7 +10795,7 @@
                           <m:sSubSup>
                             <m:sSubSupPr>
                               <m:ctrlPr>
-                                <a:rPr lang="en-US" i="1">
+                                <a:rPr lang="en-US" b="1">
                                   <a:solidFill>
                                     <a:srgbClr val="0070C0"/>
                                   </a:solidFill>
@@ -11525,7 +10875,7 @@
                             <m:accPr>
                               <m:chr m:val="̅"/>
                               <m:ctrlPr>
-                                <a:rPr lang="en-US" i="1">
+                                <a:rPr lang="en-US" b="1">
                                   <a:solidFill>
                                     <a:srgbClr val="0070C0"/>
                                   </a:solidFill>
@@ -11601,7 +10951,7 @@
                       <m:d>
                         <m:dPr>
                           <m:ctrlPr>
-                            <a:rPr lang="en-US" b="0" i="1" smtClean="0">
+                            <a:rPr lang="en-US" b="1" i="0" smtClean="0">
                               <a:solidFill>
                                 <a:srgbClr val="C00000"/>
                               </a:solidFill>
@@ -11665,7 +11015,7 @@
                       <m:d>
                         <m:dPr>
                           <m:ctrlPr>
-                            <a:rPr lang="en-US" b="0" i="1" smtClean="0">
+                            <a:rPr lang="en-US" i="1">
                               <a:solidFill>
                                 <a:srgbClr val="0070C0"/>
                               </a:solidFill>
@@ -11677,7 +11027,7 @@
                           <m:sSubSup>
                             <m:sSubSupPr>
                               <m:ctrlPr>
-                                <a:rPr lang="en-US" i="1">
+                                <a:rPr lang="en-US" b="1">
                                   <a:solidFill>
                                     <a:srgbClr val="0070C0"/>
                                   </a:solidFill>
@@ -11752,7 +11102,7 @@
                       <m:d>
                         <m:dPr>
                           <m:ctrlPr>
-                            <a:rPr lang="en-US" i="1">
+                            <a:rPr lang="en-US" b="1" i="0" smtClean="0">
                               <a:latin typeface="Cambria Math" panose="02040503050406030204" pitchFamily="18" charset="0"/>
                             </a:rPr>
                           </m:ctrlPr>
@@ -11779,7 +11129,7 @@
                           <m:sSubSup>
                             <m:sSubSupPr>
                               <m:ctrlPr>
-                                <a:rPr lang="en-US" i="1">
+                                <a:rPr lang="en-US" b="1">
                                   <a:latin typeface="Cambria Math" panose="02040503050406030204" pitchFamily="18" charset="0"/>
                                 </a:rPr>
                               </m:ctrlPr>
@@ -11854,7 +11204,7 @@
                       <m:sSubSup>
                         <m:sSubSupPr>
                           <m:ctrlPr>
-                            <a:rPr lang="en-US" i="1">
+                            <a:rPr lang="en-US" b="1">
                               <a:solidFill>
                                 <a:srgbClr val="0070C0"/>
                               </a:solidFill>
@@ -11925,7 +11275,7 @@
                         <m:accPr>
                           <m:chr m:val="̅"/>
                           <m:ctrlPr>
-                            <a:rPr lang="en-US" i="1">
+                            <a:rPr lang="en-US" b="1">
                               <a:solidFill>
                                 <a:srgbClr val="0070C0"/>
                               </a:solidFill>
@@ -11976,7 +11326,7 @@
                     <m:sSubSup>
                       <m:sSubSupPr>
                         <m:ctrlPr>
-                          <a:rPr lang="en-US" i="1">
+                          <a:rPr lang="en-US" b="1">
                             <a:latin typeface="Cambria Math" panose="02040503050406030204" pitchFamily="18" charset="0"/>
                           </a:rPr>
                         </m:ctrlPr>
@@ -12065,7 +11415,7 @@
                       <m:accPr>
                         <m:chr m:val="̅"/>
                         <m:ctrlPr>
-                          <a:rPr lang="en-US" i="1">
+                          <a:rPr lang="en-US" b="1">
                             <a:latin typeface="Cambria Math" panose="02040503050406030204" pitchFamily="18" charset="0"/>
                           </a:rPr>
                         </m:ctrlPr>
@@ -12098,7 +11448,7 @@
                     <m:oMathParaPr>
                       <m:jc m:val="center"/>
                     </m:oMathParaPr>
-                    <m:oMath xmlns:m="http://schemas.openxmlformats.org/officeDocument/2006/math">
+                    <m:oMath>
                       <m:sSubSup>
                         <m:sSubSupPr>
                           <m:ctrlPr>
@@ -12135,7 +11485,7 @@
                       <m:d>
                         <m:dPr>
                           <m:ctrlPr>
-                            <a:rPr lang="en-US" i="1">
+                            <a:rPr lang="en-US" b="1">
                               <a:latin typeface="Cambria Math" panose="02040503050406030204" pitchFamily="18" charset="0"/>
                             </a:rPr>
                           </m:ctrlPr>
@@ -12208,7 +11558,7 @@
                       <m:d>
                         <m:dPr>
                           <m:ctrlPr>
-                            <a:rPr lang="en-US" i="1">
+                            <a:rPr lang="en-US" b="1">
                               <a:latin typeface="Cambria Math" panose="02040503050406030204" pitchFamily="18" charset="0"/>
                             </a:rPr>
                           </m:ctrlPr>
@@ -12254,7 +11604,7 @@
                       <m:d>
                         <m:dPr>
                           <m:ctrlPr>
-                            <a:rPr lang="en-US" i="1">
+                            <a:rPr lang="en-US" b="1">
                               <a:latin typeface="Cambria Math" panose="02040503050406030204" pitchFamily="18" charset="0"/>
                             </a:rPr>
                           </m:ctrlPr>
@@ -12275,7 +11625,7 @@
                           <m:sSubSup>
                             <m:sSubSupPr>
                               <m:ctrlPr>
-                                <a:rPr lang="en-US" i="1">
+                                <a:rPr lang="en-US" b="1">
                                   <a:latin typeface="Cambria Math" panose="02040503050406030204" pitchFamily="18" charset="0"/>
                                 </a:rPr>
                               </m:ctrlPr>
@@ -12348,7 +11698,7 @@
                     <m:d>
                       <m:dPr>
                         <m:ctrlPr>
-                          <a:rPr lang="en-US" i="1">
+                          <a:rPr lang="en-US" b="1">
                             <a:latin typeface="Cambria Math" panose="02040503050406030204" pitchFamily="18" charset="0"/>
                           </a:rPr>
                         </m:ctrlPr>
@@ -12369,7 +11719,7 @@
                         <m:sSubSup>
                           <m:sSubSupPr>
                             <m:ctrlPr>
-                              <a:rPr lang="en-US" i="1">
+                              <a:rPr lang="en-US" b="1">
                                 <a:latin typeface="Cambria Math" panose="02040503050406030204" pitchFamily="18" charset="0"/>
                               </a:rPr>
                             </m:ctrlPr>
@@ -12507,10 +11857,7 @@
                 </a:pPr>
                 <a14:m>
                   <m:oMathPara xmlns:m="http://schemas.openxmlformats.org/officeDocument/2006/math">
-                    <m:oMathParaPr>
-                      <m:jc m:val="centerGroup"/>
-                    </m:oMathParaPr>
-                    <m:oMath xmlns:m="http://schemas.openxmlformats.org/officeDocument/2006/math">
+                    <m:oMath>
                       <m:sSubSup>
                         <m:sSubSupPr>
                           <m:ctrlPr>
@@ -12547,7 +11894,7 @@
                       <m:d>
                         <m:dPr>
                           <m:ctrlPr>
-                            <a:rPr lang="en-US" i="1">
+                            <a:rPr lang="en-US" b="1">
                               <a:latin typeface="Cambria Math" panose="02040503050406030204" pitchFamily="18" charset="0"/>
                             </a:rPr>
                           </m:ctrlPr>
@@ -12620,7 +11967,7 @@
                       <m:d>
                         <m:dPr>
                           <m:ctrlPr>
-                            <a:rPr lang="en-US" i="1">
+                            <a:rPr lang="en-US" b="1">
                               <a:latin typeface="Cambria Math" panose="02040503050406030204" pitchFamily="18" charset="0"/>
                             </a:rPr>
                           </m:ctrlPr>
@@ -12804,7 +12151,7 @@
           <a:p>
             <a:fld id="{05F4C169-8926-6248-A136-3B01A72C7471}" type="datetime1">
               <a:rPr lang="en-US" smtClean="0"/>
-              <a:t>5/5/26</a:t>
+              <a:t>8/13/26</a:t>
             </a:fld>
             <a:endParaRPr lang="en-US"/>
           </a:p>
@@ -13603,7 +12950,7 @@
                     <m:sSup>
                       <m:sSupPr>
                         <m:ctrlPr>
-                          <a:rPr lang="en-US" b="1" i="1" smtClean="0">
+                          <a:rPr lang="en-US" b="1" i="0" smtClean="0">
                             <a:latin typeface="Cambria Math" panose="02040503050406030204" pitchFamily="18" charset="0"/>
                           </a:rPr>
                         </m:ctrlPr>
@@ -13646,7 +12993,7 @@
                     <m:sSup>
                       <m:sSupPr>
                         <m:ctrlPr>
-                          <a:rPr lang="en-US" b="0" i="1" smtClean="0">
+                          <a:rPr lang="en-US" b="1" i="0" smtClean="0">
                             <a:latin typeface="Cambria Math" panose="02040503050406030204" pitchFamily="18" charset="0"/>
                           </a:rPr>
                         </m:ctrlPr>
@@ -13689,7 +13036,7 @@
                     <m:sSup>
                       <m:sSupPr>
                         <m:ctrlPr>
-                          <a:rPr lang="en-US" b="0" i="1" smtClean="0">
+                          <a:rPr lang="en-US" b="1" i="0" smtClean="0">
                             <a:latin typeface="Cambria Math" panose="02040503050406030204" pitchFamily="18" charset="0"/>
                           </a:rPr>
                         </m:ctrlPr>
@@ -14117,7 +13464,7 @@
           <a:p>
             <a:fld id="{D5F754BC-BE03-2B49-A30F-4A00AE0C40FC}" type="datetime1">
               <a:rPr lang="en-US" smtClean="0"/>
-              <a:t>5/5/26</a:t>
+              <a:t>8/13/26</a:t>
             </a:fld>
             <a:endParaRPr lang="en-US"/>
           </a:p>
@@ -14898,7 +14245,7 @@
                     <m:d>
                       <m:dPr>
                         <m:ctrlPr>
-                          <a:rPr lang="en-US" b="0" i="1" smtClean="0">
+                          <a:rPr lang="en-US" i="1">
                             <a:latin typeface="Cambria Math" panose="02040503050406030204" pitchFamily="18" charset="0"/>
                           </a:rPr>
                         </m:ctrlPr>
@@ -14976,7 +14323,7 @@
                             <m:sSup>
                               <m:sSupPr>
                                 <m:ctrlPr>
-                                  <a:rPr lang="en-US" i="1">
+                                  <a:rPr lang="en-US" b="0" i="1" smtClean="0">
                                     <a:latin typeface="Cambria Math" panose="02040503050406030204" pitchFamily="18" charset="0"/>
                                   </a:rPr>
                                 </m:ctrlPr>
@@ -15025,7 +14372,7 @@
                     <m:sSup>
                       <m:sSupPr>
                         <m:ctrlPr>
-                          <a:rPr lang="en-US" i="1">
+                          <a:rPr lang="en-US" b="0" i="1" smtClean="0">
                             <a:latin typeface="Cambria Math" panose="02040503050406030204" pitchFamily="18" charset="0"/>
                           </a:rPr>
                         </m:ctrlPr>
@@ -15138,7 +14485,7 @@
           <a:p>
             <a:fld id="{8891C768-1593-A844-806B-8421BE4EBDEC}" type="datetime1">
               <a:rPr lang="en-US" smtClean="0"/>
-              <a:t>5/5/26</a:t>
+              <a:t>8/13/26</a:t>
             </a:fld>
             <a:endParaRPr lang="en-US"/>
           </a:p>
@@ -15924,7 +15271,7 @@
                     <m:d>
                       <m:dPr>
                         <m:ctrlPr>
-                          <a:rPr lang="en-US" b="0" i="1" smtClean="0">
+                          <a:rPr lang="en-US" i="1">
                             <a:latin typeface="Cambria Math" panose="02040503050406030204" pitchFamily="18" charset="0"/>
                           </a:rPr>
                         </m:ctrlPr>
@@ -16002,7 +15349,7 @@
                             <m:sSup>
                               <m:sSupPr>
                                 <m:ctrlPr>
-                                  <a:rPr lang="en-US" i="1">
+                                  <a:rPr lang="en-US" b="0" i="1" smtClean="0">
                                     <a:latin typeface="Cambria Math" panose="02040503050406030204" pitchFamily="18" charset="0"/>
                                   </a:rPr>
                                 </m:ctrlPr>
@@ -16051,7 +15398,7 @@
                     <m:sSup>
                       <m:sSupPr>
                         <m:ctrlPr>
-                          <a:rPr lang="en-US" i="1">
+                          <a:rPr lang="en-US" b="0" i="1" smtClean="0">
                             <a:latin typeface="Cambria Math" panose="02040503050406030204" pitchFamily="18" charset="0"/>
                           </a:rPr>
                         </m:ctrlPr>
@@ -16180,7 +15527,7 @@
           <a:p>
             <a:fld id="{449234BA-4151-4A4C-9729-8B359F8379C6}" type="datetime1">
               <a:rPr lang="en-US" smtClean="0"/>
-              <a:t>5/5/26</a:t>
+              <a:t>8/13/26</a:t>
             </a:fld>
             <a:endParaRPr lang="en-US"/>
           </a:p>
@@ -16618,7 +15965,7 @@
                     <m:oMathParaPr>
                       <m:jc m:val="center"/>
                     </m:oMathParaPr>
-                    <m:oMath xmlns:m="http://schemas.openxmlformats.org/officeDocument/2006/math">
+                    <m:oMath>
                       <m:sSubSup>
                         <m:sSubSupPr>
                           <m:ctrlPr>
@@ -16655,7 +16002,7 @@
                       <m:d>
                         <m:dPr>
                           <m:ctrlPr>
-                            <a:rPr lang="en-US" sz="2400" i="1" smtClean="0">
+                            <a:rPr lang="en-US" sz="2400" b="1" i="0" smtClean="0">
                               <a:latin typeface="Cambria Math" panose="02040503050406030204" pitchFamily="18" charset="0"/>
                             </a:rPr>
                           </m:ctrlPr>
@@ -16687,7 +16034,7 @@
                           <m:limLow>
                             <m:limLowPr>
                               <m:ctrlPr>
-                                <a:rPr lang="en-US" sz="2400" i="1" smtClean="0">
+                                <a:rPr lang="en-US" sz="2400" smtClean="0">
                                   <a:latin typeface="Cambria Math" panose="02040503050406030204" pitchFamily="18" charset="0"/>
                                 </a:rPr>
                               </m:ctrlPr>
@@ -16707,7 +16054,7 @@
                               <m:sSub>
                                 <m:sSubPr>
                                   <m:ctrlPr>
-                                    <a:rPr lang="en-US" sz="2400" b="0" i="1" smtClean="0">
+                                    <a:rPr lang="en-US" sz="2400" b="1" i="0" smtClean="0">
                                       <a:latin typeface="Cambria Math" panose="02040503050406030204" pitchFamily="18" charset="0"/>
                                     </a:rPr>
                                   </m:ctrlPr>
@@ -16738,7 +16085,7 @@
                               <m:sSub>
                                 <m:sSubPr>
                                   <m:ctrlPr>
-                                    <a:rPr lang="en-US" sz="2400" i="1">
+                                    <a:rPr lang="en-US" sz="2400" b="1">
                                       <a:latin typeface="Cambria Math" panose="02040503050406030204" pitchFamily="18" charset="0"/>
                                     </a:rPr>
                                   </m:ctrlPr>
@@ -16773,7 +16120,7 @@
                           <m:sSubSup>
                             <m:sSubSupPr>
                               <m:ctrlPr>
-                                <a:rPr lang="en-US" sz="2400" b="0" i="1" smtClean="0">
+                                <a:rPr lang="en-US" sz="2400" b="1">
                                   <a:latin typeface="Cambria Math" panose="02040503050406030204" pitchFamily="18" charset="0"/>
                                 </a:rPr>
                               </m:ctrlPr>
@@ -16812,7 +16159,7 @@
                           <m:sSub>
                             <m:sSubPr>
                               <m:ctrlPr>
-                                <a:rPr lang="en-US" sz="2400" i="1">
+                                <a:rPr lang="en-US" sz="2400" b="1">
                                   <a:latin typeface="Cambria Math" panose="02040503050406030204" pitchFamily="18" charset="0"/>
                                 </a:rPr>
                               </m:ctrlPr>
@@ -16846,7 +16193,7 @@
                         <m:naryPr>
                           <m:chr m:val="∑"/>
                           <m:ctrlPr>
-                            <a:rPr lang="en-US" sz="2400" i="1">
+                            <a:rPr lang="en-US" sz="2400" i="1" smtClean="0">
                               <a:latin typeface="Cambria Math" panose="02040503050406030204" pitchFamily="18" charset="0"/>
                             </a:rPr>
                           </m:ctrlPr>
@@ -16886,7 +16233,7 @@
                           <m:sSubSup>
                             <m:sSubSupPr>
                               <m:ctrlPr>
-                                <a:rPr lang="en-US" sz="2400" b="0" i="1" smtClean="0">
+                                <a:rPr lang="en-US" sz="2400" b="1">
                                   <a:latin typeface="Cambria Math" panose="02040503050406030204" pitchFamily="18" charset="0"/>
                                 </a:rPr>
                               </m:ctrlPr>
@@ -16925,7 +16272,7 @@
                           <m:sSub>
                             <m:sSubPr>
                               <m:ctrlPr>
-                                <a:rPr lang="en-US" sz="2400" i="1">
+                                <a:rPr lang="en-US" sz="2400" b="1">
                                   <a:latin typeface="Cambria Math" panose="02040503050406030204" pitchFamily="18" charset="0"/>
                                 </a:rPr>
                               </m:ctrlPr>
@@ -16956,7 +16303,7 @@
                           <m:sSubSup>
                             <m:sSubSupPr>
                               <m:ctrlPr>
-                                <a:rPr lang="en-US" sz="2400" b="0" i="1" smtClean="0">
+                                <a:rPr lang="en-US" sz="2400" b="1">
                                   <a:latin typeface="Cambria Math" panose="02040503050406030204" pitchFamily="18" charset="0"/>
                                 </a:rPr>
                               </m:ctrlPr>
@@ -16995,7 +16342,7 @@
                           <m:sSub>
                             <m:sSubPr>
                               <m:ctrlPr>
-                                <a:rPr lang="en-US" sz="2400" i="1">
+                                <a:rPr lang="en-US" sz="2400" b="1">
                                   <a:latin typeface="Cambria Math" panose="02040503050406030204" pitchFamily="18" charset="0"/>
                                 </a:rPr>
                               </m:ctrlPr>
@@ -17117,7 +16464,7 @@
                     <m:sSub>
                       <m:sSubPr>
                         <m:ctrlPr>
-                          <a:rPr lang="en-US" sz="2400" i="1">
+                          <a:rPr lang="en-US" sz="2400" b="1" i="0" smtClean="0">
                             <a:latin typeface="Cambria Math" panose="02040503050406030204" pitchFamily="18" charset="0"/>
                           </a:rPr>
                         </m:ctrlPr>
@@ -17166,7 +16513,7 @@
                     <m:sSub>
                       <m:sSubPr>
                         <m:ctrlPr>
-                          <a:rPr lang="en-US" sz="2400" i="1">
+                          <a:rPr lang="en-US" sz="2400" b="1">
                             <a:latin typeface="Cambria Math" panose="02040503050406030204" pitchFamily="18" charset="0"/>
                           </a:rPr>
                         </m:ctrlPr>
@@ -17203,7 +16550,7 @@
                     <m:sSub>
                       <m:sSubPr>
                         <m:ctrlPr>
-                          <a:rPr lang="en-US" sz="2400" i="1">
+                          <a:rPr lang="en-US" sz="2400" b="1" i="0" smtClean="0">
                             <a:latin typeface="Cambria Math" panose="02040503050406030204" pitchFamily="18" charset="0"/>
                           </a:rPr>
                         </m:ctrlPr>
@@ -17349,7 +16696,7 @@
                     <m:sSub>
                       <m:sSubPr>
                         <m:ctrlPr>
-                          <a:rPr lang="en-US" sz="2400" i="1">
+                          <a:rPr lang="en-US" sz="2400" b="1" i="0" smtClean="0">
                             <a:latin typeface="Cambria Math" panose="02040503050406030204" pitchFamily="18" charset="0"/>
                           </a:rPr>
                         </m:ctrlPr>
@@ -17398,7 +16745,7 @@
                     <m:sSub>
                       <m:sSubPr>
                         <m:ctrlPr>
-                          <a:rPr lang="en-US" sz="2400" i="1">
+                          <a:rPr lang="en-US" sz="2400" b="1" i="0" smtClean="0">
                             <a:latin typeface="Cambria Math" panose="02040503050406030204" pitchFamily="18" charset="0"/>
                           </a:rPr>
                         </m:ctrlPr>
@@ -17559,7 +16906,7 @@
                     <m:sSub>
                       <m:sSubPr>
                         <m:ctrlPr>
-                          <a:rPr lang="en-US" sz="2400" i="1">
+                          <a:rPr lang="en-US" sz="2400" b="1" i="0" smtClean="0">
                             <a:latin typeface="Cambria Math" panose="02040503050406030204" pitchFamily="18" charset="0"/>
                           </a:rPr>
                         </m:ctrlPr>
@@ -17709,7 +17056,7 @@
                     <m:sSub>
                       <m:sSubPr>
                         <m:ctrlPr>
-                          <a:rPr lang="en-US" sz="2400" i="1">
+                          <a:rPr lang="en-US" sz="2400" b="1" i="0" smtClean="0">
                             <a:latin typeface="Cambria Math" panose="02040503050406030204" pitchFamily="18" charset="0"/>
                           </a:rPr>
                         </m:ctrlPr>
@@ -17824,7 +17171,7 @@
           <a:p>
             <a:fld id="{8435EEC3-4812-B84F-BDA6-EE53C4135C6F}" type="datetime1">
               <a:rPr lang="en-US" smtClean="0"/>
-              <a:t>5/5/26</a:t>
+              <a:t>8/13/26</a:t>
             </a:fld>
             <a:endParaRPr lang="en-US"/>
           </a:p>
@@ -20453,7 +19800,7 @@
           <a:p>
             <a:fld id="{C4579774-6D1D-A14C-8BF1-4CFBCF0F1290}" type="datetime1">
               <a:rPr lang="en-US" smtClean="0"/>
-              <a:t>5/5/26</a:t>
+              <a:t>8/13/26</a:t>
             </a:fld>
             <a:endParaRPr lang="en-US"/>
           </a:p>
@@ -20635,7 +19982,7 @@
                     <m:sSubSup>
                       <m:sSubSupPr>
                         <m:ctrlPr>
-                          <a:rPr lang="en-US" b="1" i="1" smtClean="0">
+                          <a:rPr lang="en-US" b="1" i="0" smtClean="0">
                             <a:latin typeface="Cambria Math" panose="02040503050406030204" pitchFamily="18" charset="0"/>
                           </a:rPr>
                         </m:ctrlPr>
@@ -20705,7 +20052,7 @@
                     <m:sSub>
                       <m:sSubPr>
                         <m:ctrlPr>
-                          <a:rPr lang="en-US" b="1" i="1" smtClean="0">
+                          <a:rPr lang="en-US" b="1" i="0" smtClean="0">
                             <a:latin typeface="Cambria Math" panose="02040503050406030204" pitchFamily="18" charset="0"/>
                           </a:rPr>
                         </m:ctrlPr>
@@ -20784,7 +20131,7 @@
                     <m:d>
                       <m:dPr>
                         <m:ctrlPr>
-                          <a:rPr lang="en-US" b="0" i="1" smtClean="0">
+                          <a:rPr lang="en-US" b="1" i="0" smtClean="0">
                             <a:latin typeface="Cambria Math" panose="02040503050406030204" pitchFamily="18" charset="0"/>
                           </a:rPr>
                         </m:ctrlPr>
@@ -21180,7 +20527,7 @@
           <a:p>
             <a:fld id="{0FCC8A44-0889-4C43-B9FC-0905E3B536CC}" type="datetime1">
               <a:rPr lang="en-US" smtClean="0"/>
-              <a:t>5/5/26</a:t>
+              <a:t>8/13/26</a:t>
             </a:fld>
             <a:endParaRPr lang="en-US"/>
           </a:p>
@@ -21380,7 +20727,7 @@
                     <m:sSub>
                       <m:sSubPr>
                         <m:ctrlPr>
-                          <a:rPr lang="en-US" b="0" i="1" dirty="0" smtClean="0">
+                          <a:rPr lang="en-US" i="1" dirty="0" smtClean="0">
                             <a:latin typeface="Cambria Math" panose="02040503050406030204" pitchFamily="18" charset="0"/>
                           </a:rPr>
                         </m:ctrlPr>
@@ -21648,7 +20995,7 @@
           <a:p>
             <a:fld id="{003362D6-7D9C-724F-8623-5E741116D1B7}" type="datetime1">
               <a:rPr lang="en-US" smtClean="0"/>
-              <a:t>5/5/26</a:t>
+              <a:t>8/13/26</a:t>
             </a:fld>
             <a:endParaRPr lang="en-US"/>
           </a:p>
@@ -21848,7 +21195,7 @@
                         <m:sSubSup>
                           <m:sSubSupPr>
                             <m:ctrlPr>
-                              <a:rPr lang="en-US" i="1">
+                              <a:rPr lang="en-US" b="1">
                                 <a:latin typeface="Cambria Math" panose="02040503050406030204" pitchFamily="18" charset="0"/>
                               </a:rPr>
                             </m:ctrlPr>
@@ -21887,7 +21234,7 @@
                         <m:sSub>
                           <m:sSubPr>
                             <m:ctrlPr>
-                              <a:rPr lang="en-US" i="1">
+                              <a:rPr lang="en-US" b="1">
                                 <a:latin typeface="Cambria Math" panose="02040503050406030204" pitchFamily="18" charset="0"/>
                               </a:rPr>
                             </m:ctrlPr>
@@ -21918,7 +21265,7 @@
                         <m:sSubSup>
                           <m:sSubSupPr>
                             <m:ctrlPr>
-                              <a:rPr lang="en-US" i="1" smtClean="0">
+                              <a:rPr lang="en-US" b="1">
                                 <a:latin typeface="Cambria Math" panose="02040503050406030204" pitchFamily="18" charset="0"/>
                               </a:rPr>
                             </m:ctrlPr>
@@ -21957,7 +21304,7 @@
                         <m:sSub>
                           <m:sSubPr>
                             <m:ctrlPr>
-                              <a:rPr lang="en-US" i="1">
+                              <a:rPr lang="en-US" b="1">
                                 <a:latin typeface="Cambria Math" panose="02040503050406030204" pitchFamily="18" charset="0"/>
                               </a:rPr>
                             </m:ctrlPr>
@@ -22036,7 +21383,7 @@
                     <m:sSub>
                       <m:sSubPr>
                         <m:ctrlPr>
-                          <a:rPr lang="en-US" i="1">
+                          <a:rPr lang="en-US" b="1">
                             <a:latin typeface="Cambria Math" panose="02040503050406030204" pitchFamily="18" charset="0"/>
                           </a:rPr>
                         </m:ctrlPr>
@@ -22067,7 +21414,7 @@
                     <m:sSub>
                       <m:sSubPr>
                         <m:ctrlPr>
-                          <a:rPr lang="en-US" i="1">
+                          <a:rPr lang="en-US" b="1">
                             <a:latin typeface="Cambria Math" panose="02040503050406030204" pitchFamily="18" charset="0"/>
                           </a:rPr>
                         </m:ctrlPr>
@@ -22110,7 +21457,7 @@
                     <m:sSub>
                       <m:sSubPr>
                         <m:ctrlPr>
-                          <a:rPr lang="en-US" i="1">
+                          <a:rPr lang="en-US" b="1">
                             <a:latin typeface="Cambria Math" panose="02040503050406030204" pitchFamily="18" charset="0"/>
                           </a:rPr>
                         </m:ctrlPr>
@@ -22211,7 +21558,7 @@
           <a:p>
             <a:fld id="{592F1C33-8767-574D-AB0C-AC5EA77C8016}" type="datetime1">
               <a:rPr lang="en-US" smtClean="0"/>
-              <a:t>5/5/26</a:t>
+              <a:t>8/13/26</a:t>
             </a:fld>
             <a:endParaRPr lang="en-US"/>
           </a:p>
@@ -22449,7 +21796,7 @@
                     <m:sSubSup>
                       <m:sSubSupPr>
                         <m:ctrlPr>
-                          <a:rPr lang="en-US" b="0" i="1" smtClean="0">
+                          <a:rPr lang="en-US" b="1" i="0" smtClean="0">
                             <a:latin typeface="Cambria Math" panose="02040503050406030204" pitchFamily="18" charset="0"/>
                           </a:rPr>
                         </m:ctrlPr>
@@ -22762,7 +22109,7 @@
                     <m:oMathParaPr>
                       <m:jc m:val="center"/>
                     </m:oMathParaPr>
-                    <m:oMath xmlns:m="http://schemas.openxmlformats.org/officeDocument/2006/math">
+                    <m:oMath>
                       <m:sSubSup>
                         <m:sSubSupPr>
                           <m:ctrlPr>
@@ -22799,7 +22146,7 @@
                       <m:d>
                         <m:dPr>
                           <m:ctrlPr>
-                            <a:rPr lang="en-US" sz="2400" i="1" smtClean="0">
+                            <a:rPr lang="en-US" sz="2400" b="1" i="0" smtClean="0">
                               <a:latin typeface="Cambria Math" panose="02040503050406030204" pitchFamily="18" charset="0"/>
                             </a:rPr>
                           </m:ctrlPr>
@@ -22848,7 +22195,7 @@
                           <m:limLow>
                             <m:limLowPr>
                               <m:ctrlPr>
-                                <a:rPr lang="en-US" sz="2400" b="0" i="1" smtClean="0">
+                                <a:rPr lang="en-US" sz="2400" b="0" i="0" smtClean="0">
                                   <a:latin typeface="Cambria Math" panose="02040503050406030204" pitchFamily="18" charset="0"/>
                                 </a:rPr>
                               </m:ctrlPr>
@@ -22874,7 +22221,7 @@
                               <m:sSub>
                                 <m:sSubPr>
                                   <m:ctrlPr>
-                                    <a:rPr lang="en-US" sz="2400" b="0" i="1" smtClean="0">
+                                    <a:rPr lang="en-US" sz="2400" b="1" i="0" smtClean="0">
                                       <a:latin typeface="Cambria Math" panose="02040503050406030204" pitchFamily="18" charset="0"/>
                                     </a:rPr>
                                   </m:ctrlPr>
@@ -22911,7 +22258,7 @@
                               <m:sSub>
                                 <m:sSubPr>
                                   <m:ctrlPr>
-                                    <a:rPr lang="en-US" sz="2400" b="0" i="1" smtClean="0">
+                                    <a:rPr lang="en-US" sz="2400" b="1" i="0" smtClean="0">
                                       <a:latin typeface="Cambria Math" panose="02040503050406030204" pitchFamily="18" charset="0"/>
                                     </a:rPr>
                                   </m:ctrlPr>
@@ -22986,7 +22333,7 @@
                                       <m:sSub>
                                         <m:sSubPr>
                                           <m:ctrlPr>
-                                            <a:rPr lang="en-US" sz="2400" i="1">
+                                            <a:rPr lang="en-US" sz="2400" b="1">
                                               <a:latin typeface="Cambria Math" panose="02040503050406030204" pitchFamily="18" charset="0"/>
                                             </a:rPr>
                                           </m:ctrlPr>
@@ -23017,7 +22364,7 @@
                                       <m:sSub>
                                         <m:sSubPr>
                                           <m:ctrlPr>
-                                            <a:rPr lang="en-US" sz="2400" i="1">
+                                            <a:rPr lang="en-US" sz="2400" b="1">
                                               <a:latin typeface="Cambria Math" panose="02040503050406030204" pitchFamily="18" charset="0"/>
                                             </a:rPr>
                                           </m:ctrlPr>
@@ -23094,7 +22441,7 @@
                                       <m:sSub>
                                         <m:sSubPr>
                                           <m:ctrlPr>
-                                            <a:rPr lang="en-US" sz="2400" i="1">
+                                            <a:rPr lang="en-US" sz="2400" b="1">
                                               <a:latin typeface="Cambria Math" panose="02040503050406030204" pitchFamily="18" charset="0"/>
                                             </a:rPr>
                                           </m:ctrlPr>
@@ -23238,7 +22585,7 @@
                     <m:sSub>
                       <m:sSubPr>
                         <m:ctrlPr>
-                          <a:rPr lang="en-US" sz="2400" i="1">
+                          <a:rPr lang="en-US" sz="2400" b="1" i="0" smtClean="0">
                             <a:latin typeface="Cambria Math" panose="02040503050406030204" pitchFamily="18" charset="0"/>
                           </a:rPr>
                         </m:ctrlPr>
@@ -23287,7 +22634,7 @@
                     <m:sSub>
                       <m:sSubPr>
                         <m:ctrlPr>
-                          <a:rPr lang="en-US" sz="2400" i="1">
+                          <a:rPr lang="en-US" sz="2400" b="1">
                             <a:latin typeface="Cambria Math" panose="02040503050406030204" pitchFamily="18" charset="0"/>
                           </a:rPr>
                         </m:ctrlPr>
@@ -23324,7 +22671,7 @@
                     <m:sSub>
                       <m:sSubPr>
                         <m:ctrlPr>
-                          <a:rPr lang="en-US" sz="2400" i="1">
+                          <a:rPr lang="en-US" sz="2400" b="1" i="0" smtClean="0">
                             <a:latin typeface="Cambria Math" panose="02040503050406030204" pitchFamily="18" charset="0"/>
                           </a:rPr>
                         </m:ctrlPr>
@@ -23470,7 +22817,7 @@
                     <m:sSub>
                       <m:sSubPr>
                         <m:ctrlPr>
-                          <a:rPr lang="en-US" sz="2400" i="1">
+                          <a:rPr lang="en-US" sz="2400" b="1" i="0" smtClean="0">
                             <a:latin typeface="Cambria Math" panose="02040503050406030204" pitchFamily="18" charset="0"/>
                           </a:rPr>
                         </m:ctrlPr>
@@ -23519,7 +22866,7 @@
                     <m:sSub>
                       <m:sSubPr>
                         <m:ctrlPr>
-                          <a:rPr lang="en-US" sz="2400" i="1">
+                          <a:rPr lang="en-US" sz="2400" b="1" i="0" smtClean="0">
                             <a:latin typeface="Cambria Math" panose="02040503050406030204" pitchFamily="18" charset="0"/>
                           </a:rPr>
                         </m:ctrlPr>
@@ -23680,7 +23027,7 @@
                     <m:sSub>
                       <m:sSubPr>
                         <m:ctrlPr>
-                          <a:rPr lang="en-US" sz="2400" i="1">
+                          <a:rPr lang="en-US" sz="2400" b="1" i="0" smtClean="0">
                             <a:latin typeface="Cambria Math" panose="02040503050406030204" pitchFamily="18" charset="0"/>
                           </a:rPr>
                         </m:ctrlPr>
@@ -23830,7 +23177,7 @@
                     <m:sSub>
                       <m:sSubPr>
                         <m:ctrlPr>
-                          <a:rPr lang="en-US" sz="2400" i="1">
+                          <a:rPr lang="en-US" sz="2400" b="1" i="0" smtClean="0">
                             <a:latin typeface="Cambria Math" panose="02040503050406030204" pitchFamily="18" charset="0"/>
                           </a:rPr>
                         </m:ctrlPr>
@@ -23896,7 +23243,7 @@
                     <m:sSub>
                       <m:sSubPr>
                         <m:ctrlPr>
-                          <a:rPr lang="en-US" sz="2400" b="0" i="1" smtClean="0">
+                          <a:rPr lang="en-US" sz="2400" b="1" i="0" smtClean="0">
                             <a:latin typeface="Cambria Math" panose="02040503050406030204" pitchFamily="18" charset="0"/>
                           </a:rPr>
                         </m:ctrlPr>
@@ -24045,7 +23392,7 @@
                     <m:sSub>
                       <m:sSubPr>
                         <m:ctrlPr>
-                          <a:rPr lang="en-US" sz="2400" i="1">
+                          <a:rPr lang="en-US" sz="2400" b="1" i="0" smtClean="0">
                             <a:latin typeface="Cambria Math" panose="02040503050406030204" pitchFamily="18" charset="0"/>
                           </a:rPr>
                         </m:ctrlPr>
@@ -24088,7 +23435,7 @@
                     <m:sSub>
                       <m:sSubPr>
                         <m:ctrlPr>
-                          <a:rPr lang="en-US" sz="2400" b="0" i="1" smtClean="0">
+                          <a:rPr lang="en-US" sz="2400" b="1" i="0" smtClean="0">
                             <a:latin typeface="Cambria Math" panose="02040503050406030204" pitchFamily="18" charset="0"/>
                           </a:rPr>
                         </m:ctrlPr>
@@ -24231,7 +23578,7 @@
                     <m:sSub>
                       <m:sSubPr>
                         <m:ctrlPr>
-                          <a:rPr lang="en-US" sz="2400" b="0" i="1" smtClean="0">
+                          <a:rPr lang="en-US" sz="2400" b="1" i="0" smtClean="0">
                             <a:latin typeface="Cambria Math" panose="02040503050406030204" pitchFamily="18" charset="0"/>
                           </a:rPr>
                         </m:ctrlPr>
@@ -24262,7 +23609,7 @@
                     <m:sSub>
                       <m:sSubPr>
                         <m:ctrlPr>
-                          <a:rPr lang="en-US" sz="2400" b="0" i="1" smtClean="0">
+                          <a:rPr lang="en-US" sz="2400" b="1" i="0" smtClean="0">
                             <a:latin typeface="Cambria Math" panose="02040503050406030204" pitchFamily="18" charset="0"/>
                           </a:rPr>
                         </m:ctrlPr>
@@ -24305,7 +23652,7 @@
                     <m:sSub>
                       <m:sSubPr>
                         <m:ctrlPr>
-                          <a:rPr lang="en-US" sz="2400" b="0" i="1" smtClean="0">
+                          <a:rPr lang="en-US" sz="2400" b="1" i="0" smtClean="0">
                             <a:latin typeface="Cambria Math" panose="02040503050406030204" pitchFamily="18" charset="0"/>
                           </a:rPr>
                         </m:ctrlPr>
@@ -24432,7 +23779,7 @@
           <a:p>
             <a:fld id="{B3554BFC-DAAC-8B42-AEC4-206A58C527F9}" type="datetime1">
               <a:rPr lang="en-US" smtClean="0"/>
-              <a:t>5/5/26</a:t>
+              <a:t>8/13/26</a:t>
             </a:fld>
             <a:endParaRPr lang="en-US"/>
           </a:p>
@@ -24641,7 +23988,7 @@
           <a:p>
             <a:fld id="{2801745F-580E-DA4F-9992-74D4F9E9129C}" type="datetime1">
               <a:rPr lang="en-US" smtClean="0"/>
-              <a:t>5/5/26</a:t>
+              <a:t>8/13/26</a:t>
             </a:fld>
             <a:endParaRPr lang="en-US"/>
           </a:p>
@@ -24887,7 +24234,7 @@
           <a:p>
             <a:fld id="{7F35D558-BCE2-FE4B-A02C-59246E0B1451}" type="datetime1">
               <a:rPr lang="en-US" smtClean="0"/>
-              <a:t>5/5/26</a:t>
+              <a:t>8/13/26</a:t>
             </a:fld>
             <a:endParaRPr lang="en-US"/>
           </a:p>
@@ -25412,7 +24759,7 @@
           <a:p>
             <a:fld id="{21805CC7-B497-4447-ADDC-2420A672AE9C}" type="datetime1">
               <a:rPr lang="en-US" smtClean="0"/>
-              <a:t>5/5/26</a:t>
+              <a:t>8/13/26</a:t>
             </a:fld>
             <a:endParaRPr lang="en-US"/>
           </a:p>
@@ -25610,7 +24957,7 @@
                     <m:oMathParaPr>
                       <m:jc m:val="center"/>
                     </m:oMathParaPr>
-                    <m:oMath xmlns:m="http://schemas.openxmlformats.org/officeDocument/2006/math">
+                    <m:oMath>
                       <m:sSub>
                         <m:sSubPr>
                           <m:ctrlPr>
@@ -25653,7 +25000,7 @@
                           <m:begChr m:val="{"/>
                           <m:endChr m:val="|"/>
                           <m:ctrlPr>
-                            <a:rPr lang="en-US" i="1">
+                            <a:rPr lang="en-US" b="1" i="1">
                               <a:latin typeface="Cambria Math" panose="02040503050406030204" pitchFamily="18" charset="0"/>
                             </a:rPr>
                           </m:ctrlPr>
@@ -25662,7 +25009,7 @@
                           <m:sSub>
                             <m:sSubPr>
                               <m:ctrlPr>
-                                <a:rPr lang="en-US" b="1" i="1">
+                                <a:rPr lang="en-US" b="1">
                                   <a:latin typeface="Cambria Math" panose="02040503050406030204" pitchFamily="18" charset="0"/>
                                 </a:rPr>
                               </m:ctrlPr>
@@ -25726,7 +25073,7 @@
                       <m:sSub>
                         <m:sSubPr>
                           <m:ctrlPr>
-                            <a:rPr lang="en-US" b="0" i="1" smtClean="0">
+                            <a:rPr lang="en-US" b="1" i="0" smtClean="0">
                               <a:latin typeface="Cambria Math" panose="02040503050406030204" pitchFamily="18" charset="0"/>
                               <a:ea typeface="Cambria Math" panose="02040503050406030204" pitchFamily="18" charset="0"/>
                             </a:rPr>
@@ -25802,7 +25149,7 @@
                       <m:sSub>
                         <m:sSubPr>
                           <m:ctrlPr>
-                            <a:rPr lang="en-US" i="1">
+                            <a:rPr lang="en-US" b="1">
                               <a:latin typeface="Cambria Math" panose="02040503050406030204" pitchFamily="18" charset="0"/>
                               <a:ea typeface="Cambria Math" panose="02040503050406030204" pitchFamily="18" charset="0"/>
                             </a:rPr>
@@ -25856,7 +25203,7 @@
                       <m:sSub>
                         <m:sSubPr>
                           <m:ctrlPr>
-                            <a:rPr lang="en-US" i="1">
+                            <a:rPr lang="en-US" b="1">
                               <a:latin typeface="Cambria Math" panose="02040503050406030204" pitchFamily="18" charset="0"/>
                               <a:ea typeface="Cambria Math" panose="02040503050406030204" pitchFamily="18" charset="0"/>
                             </a:rPr>
@@ -25924,11 +25271,11 @@
                     <m:oMathParaPr>
                       <m:jc m:val="center"/>
                     </m:oMathParaPr>
-                    <m:oMath xmlns:m="http://schemas.openxmlformats.org/officeDocument/2006/math">
+                    <m:oMath>
                       <m:sSub>
                         <m:sSubPr>
                           <m:ctrlPr>
-                            <a:rPr lang="en-US" i="1">
+                            <a:rPr lang="en-US" b="0" i="1" smtClean="0">
                               <a:latin typeface="Cambria Math" panose="02040503050406030204" pitchFamily="18" charset="0"/>
                               <a:ea typeface="Cambria Math" panose="02040503050406030204" pitchFamily="18" charset="0"/>
                             </a:rPr>
@@ -26022,7 +25369,7 @@
                       <m:sSub>
                         <m:sSubPr>
                           <m:ctrlPr>
-                            <a:rPr lang="en-US" i="1">
+                            <a:rPr lang="en-US" b="1">
                               <a:latin typeface="Cambria Math" panose="02040503050406030204" pitchFamily="18" charset="0"/>
                               <a:ea typeface="Cambria Math" panose="02040503050406030204" pitchFamily="18" charset="0"/>
                             </a:rPr>
@@ -26064,7 +25411,7 @@
                       <m:sSub>
                         <m:sSubPr>
                           <m:ctrlPr>
-                            <a:rPr lang="en-US" i="1">
+                            <a:rPr lang="en-US" b="1">
                               <a:latin typeface="Cambria Math" panose="02040503050406030204" pitchFamily="18" charset="0"/>
                               <a:ea typeface="Cambria Math" panose="02040503050406030204" pitchFamily="18" charset="0"/>
                             </a:rPr>
@@ -26111,7 +25458,7 @@
                       <m:sSub>
                         <m:sSubPr>
                           <m:ctrlPr>
-                            <a:rPr lang="en-US" i="1">
+                            <a:rPr lang="en-US" b="1">
                               <a:latin typeface="Cambria Math" panose="02040503050406030204" pitchFamily="18" charset="0"/>
                               <a:ea typeface="Cambria Math" panose="02040503050406030204" pitchFamily="18" charset="0"/>
                             </a:rPr>
@@ -26187,7 +25534,7 @@
                     <m:oMathParaPr>
                       <m:jc m:val="center"/>
                     </m:oMathParaPr>
-                    <m:oMath xmlns:m="http://schemas.openxmlformats.org/officeDocument/2006/math">
+                    <m:oMath>
                       <m:r>
                         <a:rPr lang="en-US" i="1">
                           <a:latin typeface="Cambria Math" panose="02040503050406030204" pitchFamily="18" charset="0"/>
@@ -26197,7 +25544,7 @@
                       <m:sSub>
                         <m:sSubPr>
                           <m:ctrlPr>
-                            <a:rPr lang="en-US" b="1" i="1" smtClean="0">
+                            <a:rPr lang="en-US" b="1">
                               <a:latin typeface="Cambria Math" panose="02040503050406030204" pitchFamily="18" charset="0"/>
                             </a:rPr>
                           </m:ctrlPr>
@@ -26240,7 +25587,7 @@
                       <m:sSub>
                         <m:sSubPr>
                           <m:ctrlPr>
-                            <a:rPr lang="en-US" b="0" i="1" smtClean="0">
+                            <a:rPr lang="en-US" b="1">
                               <a:latin typeface="Cambria Math" panose="02040503050406030204" pitchFamily="18" charset="0"/>
                             </a:rPr>
                           </m:ctrlPr>
@@ -26277,7 +25624,7 @@
                       <m:sSub>
                         <m:sSubPr>
                           <m:ctrlPr>
-                            <a:rPr lang="en-US" b="0" i="1" smtClean="0">
+                            <a:rPr lang="en-US" b="1" i="0" smtClean="0">
                               <a:latin typeface="Cambria Math" panose="02040503050406030204" pitchFamily="18" charset="0"/>
                             </a:rPr>
                           </m:ctrlPr>
@@ -26433,7 +25780,7 @@
           <a:p>
             <a:fld id="{0AB546DB-35CE-FF4E-8532-ADD5BD7BE375}" type="datetime1">
               <a:rPr lang="en-US" smtClean="0"/>
-              <a:t>5/5/26</a:t>
+              <a:t>8/13/26</a:t>
             </a:fld>
             <a:endParaRPr lang="en-US"/>
           </a:p>
@@ -26680,11 +26027,11 @@
                     <m:oMathParaPr>
                       <m:jc m:val="center"/>
                     </m:oMathParaPr>
-                    <m:oMath xmlns:m="http://schemas.openxmlformats.org/officeDocument/2006/math">
+                    <m:oMath>
                       <m:sSup>
                         <m:sSupPr>
                           <m:ctrlPr>
-                            <a:rPr lang="en-US" b="0" i="1" smtClean="0">
+                            <a:rPr lang="en-US" b="1" i="0" smtClean="0">
                               <a:latin typeface="Cambria Math" panose="02040503050406030204" pitchFamily="18" charset="0"/>
                             </a:rPr>
                           </m:ctrlPr>
@@ -26721,7 +26068,7 @@
                       <m:sSub>
                         <m:sSubPr>
                           <m:ctrlPr>
-                            <a:rPr lang="en-US" b="1" i="1" smtClean="0">
+                            <a:rPr lang="en-US" b="1" i="0" smtClean="0">
                               <a:latin typeface="Cambria Math" panose="02040503050406030204" pitchFamily="18" charset="0"/>
                             </a:rPr>
                           </m:ctrlPr>
@@ -26875,7 +26222,7 @@
                     <m:sSub>
                       <m:sSubPr>
                         <m:ctrlPr>
-                          <a:rPr lang="en-US" b="1" i="1">
+                          <a:rPr lang="en-US" b="1">
                             <a:latin typeface="Cambria Math" panose="02040503050406030204" pitchFamily="18" charset="0"/>
                           </a:rPr>
                         </m:ctrlPr>
@@ -26918,7 +26265,7 @@
                     <m:sSub>
                       <m:sSubPr>
                         <m:ctrlPr>
-                          <a:rPr lang="en-US" i="1">
+                          <a:rPr lang="en-US" b="1">
                             <a:latin typeface="Cambria Math" panose="02040503050406030204" pitchFamily="18" charset="0"/>
                           </a:rPr>
                         </m:ctrlPr>
@@ -26955,7 +26302,7 @@
                     <m:sSub>
                       <m:sSubPr>
                         <m:ctrlPr>
-                          <a:rPr lang="en-US" i="1">
+                          <a:rPr lang="en-US" b="1">
                             <a:latin typeface="Cambria Math" panose="02040503050406030204" pitchFamily="18" charset="0"/>
                           </a:rPr>
                         </m:ctrlPr>
@@ -27309,7 +26656,7 @@
           <a:p>
             <a:fld id="{02AF892F-4419-2448-9755-F5C48004C1D3}" type="datetime1">
               <a:rPr lang="en-US" smtClean="0"/>
-              <a:t>5/5/26</a:t>
+              <a:t>8/13/26</a:t>
             </a:fld>
             <a:endParaRPr lang="en-US"/>
           </a:p>
@@ -27471,7 +26818,7 @@
                     <m:sSub>
                       <m:sSubPr>
                         <m:ctrlPr>
-                          <a:rPr lang="en-US" b="0" i="1" dirty="0" smtClean="0">
+                          <a:rPr lang="en-US" i="1" dirty="0" smtClean="0">
                             <a:latin typeface="Cambria Math" panose="02040503050406030204" pitchFamily="18" charset="0"/>
                           </a:rPr>
                         </m:ctrlPr>
@@ -27553,7 +26900,7 @@
                     <m:sSub>
                       <m:sSubPr>
                         <m:ctrlPr>
-                          <a:rPr lang="en-US" b="0" i="1" dirty="0" smtClean="0">
+                          <a:rPr lang="en-US" i="1" dirty="0" smtClean="0">
                             <a:latin typeface="Cambria Math" panose="02040503050406030204" pitchFamily="18" charset="0"/>
                           </a:rPr>
                         </m:ctrlPr>
@@ -27694,7 +27041,7 @@
           <a:p>
             <a:fld id="{792A97BA-C6BB-FC41-AEFA-A779DD03C55A}" type="datetime1">
               <a:rPr lang="en-US" smtClean="0"/>
-              <a:t>5/5/26</a:t>
+              <a:t>8/13/26</a:t>
             </a:fld>
             <a:endParaRPr lang="en-US"/>
           </a:p>
@@ -28012,7 +27359,7 @@
           <a:p>
             <a:fld id="{6498CF15-8EF5-CF46-AC14-B51CE7ABB06A}" type="datetime1">
               <a:rPr lang="en-US" smtClean="0"/>
-              <a:t>5/5/26</a:t>
+              <a:t>8/13/26</a:t>
             </a:fld>
             <a:endParaRPr lang="en-US"/>
           </a:p>
@@ -28215,7 +27562,7 @@
                         <m:sSub>
                           <m:sSubPr>
                             <m:ctrlPr>
-                              <a:rPr lang="en-US" b="0" i="1" smtClean="0">
+                              <a:rPr lang="en-US" b="1" i="0" smtClean="0">
                                 <a:latin typeface="Cambria Math" panose="02040503050406030204" pitchFamily="18" charset="0"/>
                               </a:rPr>
                             </m:ctrlPr>
@@ -28258,7 +27605,7 @@
                         <m:d>
                           <m:dPr>
                             <m:ctrlPr>
-                              <a:rPr lang="en-US" b="0" i="1" smtClean="0">
+                              <a:rPr lang="en-US" b="1" i="1" smtClean="0">
                                 <a:latin typeface="Cambria Math" panose="02040503050406030204" pitchFamily="18" charset="0"/>
                               </a:rPr>
                             </m:ctrlPr>
@@ -28267,7 +27614,7 @@
                             <m:sSub>
                               <m:sSubPr>
                                 <m:ctrlPr>
-                                  <a:rPr lang="en-US" b="1" i="1" smtClean="0">
+                                  <a:rPr lang="en-US" b="1" i="0" smtClean="0">
                                     <a:latin typeface="Cambria Math" panose="02040503050406030204" pitchFamily="18" charset="0"/>
                                   </a:rPr>
                                 </m:ctrlPr>
@@ -28313,7 +27660,7 @@
                     <m:d>
                       <m:dPr>
                         <m:ctrlPr>
-                          <a:rPr lang="en-US" b="0" i="1" smtClean="0">
+                          <a:rPr lang="en-US" b="1" i="1" smtClean="0">
                             <a:latin typeface="Cambria Math" panose="02040503050406030204" pitchFamily="18" charset="0"/>
                           </a:rPr>
                         </m:ctrlPr>
@@ -28507,7 +27854,7 @@
                     <m:d>
                       <m:dPr>
                         <m:ctrlPr>
-                          <a:rPr lang="en-US" b="0" i="1" smtClean="0">
+                          <a:rPr lang="en-US" b="1" i="0" smtClean="0">
                             <a:latin typeface="Cambria Math" panose="02040503050406030204" pitchFamily="18" charset="0"/>
                           </a:rPr>
                         </m:ctrlPr>
@@ -28547,7 +27894,7 @@
                     <m:d>
                       <m:dPr>
                         <m:ctrlPr>
-                          <a:rPr lang="en-US" b="0" i="1" smtClean="0">
+                          <a:rPr lang="en-US" b="1" i="0" smtClean="0">
                             <a:latin typeface="Cambria Math" panose="02040503050406030204" pitchFamily="18" charset="0"/>
                           </a:rPr>
                         </m:ctrlPr>
@@ -28648,7 +27995,7 @@
                     <m:d>
                       <m:dPr>
                         <m:ctrlPr>
-                          <a:rPr lang="en-US" i="1">
+                          <a:rPr lang="en-US" b="1" i="1" smtClean="0">
                             <a:latin typeface="Cambria Math" panose="02040503050406030204" pitchFamily="18" charset="0"/>
                           </a:rPr>
                         </m:ctrlPr>
@@ -28657,7 +28004,7 @@
                         <m:sSub>
                           <m:sSubPr>
                             <m:ctrlPr>
-                              <a:rPr lang="en-US" b="1" i="1" smtClean="0">
+                              <a:rPr lang="en-US" b="1">
                                 <a:latin typeface="Cambria Math" panose="02040503050406030204" pitchFamily="18" charset="0"/>
                               </a:rPr>
                             </m:ctrlPr>
@@ -28702,7 +28049,7 @@
                     <m:d>
                       <m:dPr>
                         <m:ctrlPr>
-                          <a:rPr lang="en-US" i="1">
+                          <a:rPr lang="en-US" b="1" i="1">
                             <a:latin typeface="Cambria Math" panose="02040503050406030204" pitchFamily="18" charset="0"/>
                           </a:rPr>
                         </m:ctrlPr>
@@ -28711,7 +28058,7 @@
                         <m:sSub>
                           <m:sSubPr>
                             <m:ctrlPr>
-                              <a:rPr lang="en-US" b="1" i="1">
+                              <a:rPr lang="en-US" b="1">
                                 <a:latin typeface="Cambria Math" panose="02040503050406030204" pitchFamily="18" charset="0"/>
                               </a:rPr>
                             </m:ctrlPr>
@@ -28773,7 +28120,7 @@
                     <m:sSub>
                       <m:sSubPr>
                         <m:ctrlPr>
-                          <a:rPr lang="en-US" b="1" i="1" dirty="0" smtClean="0">
+                          <a:rPr lang="en-US" b="1" dirty="0">
                             <a:latin typeface="Cambria Math" panose="02040503050406030204" pitchFamily="18" charset="0"/>
                           </a:rPr>
                         </m:ctrlPr>
@@ -29093,7 +28440,7 @@
           <a:p>
             <a:fld id="{3216D988-49AF-0545-89DF-BAD8C15AF9A1}" type="datetime1">
               <a:rPr lang="en-US" smtClean="0"/>
-              <a:t>5/5/26</a:t>
+              <a:t>8/13/26</a:t>
             </a:fld>
             <a:endParaRPr lang="en-US"/>
           </a:p>
@@ -29693,6 +29040,15 @@
 </file>
 
 <file path=customXml/item1.xml><?xml version="1.0" encoding="utf-8"?>
+<?mso-contentType ?>
+<FormTemplates xmlns="http://schemas.microsoft.com/sharepoint/v3/contenttype/forms">
+  <Display>DocumentLibraryForm</Display>
+  <Edit>DocumentLibraryForm</Edit>
+  <New>DocumentLibraryForm</New>
+</FormTemplates>
+</file>
+
+<file path=customXml/item2.xml><?xml version="1.0" encoding="utf-8"?>
 <ct:contentTypeSchema xmlns:ct="http://schemas.microsoft.com/office/2006/metadata/contentType" xmlns:ma="http://schemas.microsoft.com/office/2006/metadata/properties/metaAttributes" ct:_="" ma:_="" ma:contentTypeName="Document" ma:contentTypeID="0x0101001AFBB6EF975807449194B44213CB1385" ma:contentTypeVersion="5" ma:contentTypeDescription="Create a new document." ma:contentTypeScope="" ma:versionID="6297688411df770d7ba805098bf03ebd">
   <xsd:schema xmlns:xsd="http://www.w3.org/2001/XMLSchema" xmlns:xs="http://www.w3.org/2001/XMLSchema" xmlns:p="http://schemas.microsoft.com/office/2006/metadata/properties" xmlns:ns3="d1af692f-475c-46b5-a87d-a47813ac8995" xmlns:ns4="ec38afac-11fd-4f05-b2a5-9d8ac7fc116b" targetNamespace="http://schemas.microsoft.com/office/2006/metadata/properties" ma:root="true" ma:fieldsID="a8acf1f0a3134d6bce4e4716f1f754da" ns3:_="" ns4:_="">
     <xsd:import namespace="d1af692f-475c-46b5-a87d-a47813ac8995"/>
@@ -29863,15 +29219,6 @@
 </ct:contentTypeSchema>
 </file>
 
-<file path=customXml/item2.xml><?xml version="1.0" encoding="utf-8"?>
-<?mso-contentType ?>
-<FormTemplates xmlns="http://schemas.microsoft.com/sharepoint/v3/contenttype/forms">
-  <Display>DocumentLibraryForm</Display>
-  <Edit>DocumentLibraryForm</Edit>
-  <New>DocumentLibraryForm</New>
-</FormTemplates>
-</file>
-
 <file path=customXml/item3.xml><?xml version="1.0" encoding="utf-8"?>
 <p:properties xmlns:p="http://schemas.microsoft.com/office/2006/metadata/properties" xmlns:xsi="http://www.w3.org/2001/XMLSchema-instance" xmlns:pc="http://schemas.microsoft.com/office/infopath/2007/PartnerControls">
   <documentManagement/>
@@ -29879,6 +29226,14 @@
 </file>
 
 <file path=customXml/itemProps1.xml><?xml version="1.0" encoding="utf-8"?>
+<ds:datastoreItem xmlns:ds="http://schemas.openxmlformats.org/officeDocument/2006/customXml" ds:itemID="{54562D76-7A15-45B5-A885-BDA6B89EFCFA}">
+  <ds:schemaRefs>
+    <ds:schemaRef ds:uri="http://schemas.microsoft.com/sharepoint/v3/contenttype/forms"/>
+  </ds:schemaRefs>
+</ds:datastoreItem>
+</file>
+
+<file path=customXml/itemProps2.xml><?xml version="1.0" encoding="utf-8"?>
 <ds:datastoreItem xmlns:ds="http://schemas.openxmlformats.org/officeDocument/2006/customXml" ds:itemID="{3BAFF5A3-C4BC-4265-8729-DA8E69FA5B2D}">
   <ds:schemaRefs>
     <ds:schemaRef ds:uri="http://schemas.microsoft.com/office/2006/metadata/contentType"/>
@@ -29897,27 +29252,19 @@
 </ds:datastoreItem>
 </file>
 
-<file path=customXml/itemProps2.xml><?xml version="1.0" encoding="utf-8"?>
-<ds:datastoreItem xmlns:ds="http://schemas.openxmlformats.org/officeDocument/2006/customXml" ds:itemID="{54562D76-7A15-45B5-A885-BDA6B89EFCFA}">
-  <ds:schemaRefs>
-    <ds:schemaRef ds:uri="http://schemas.microsoft.com/sharepoint/v3/contenttype/forms"/>
-  </ds:schemaRefs>
-</ds:datastoreItem>
-</file>
-
 <file path=customXml/itemProps3.xml><?xml version="1.0" encoding="utf-8"?>
 <ds:datastoreItem xmlns:ds="http://schemas.openxmlformats.org/officeDocument/2006/customXml" ds:itemID="{498AE869-6B4B-4B8A-A5D5-6420A2F75278}">
   <ds:schemaRefs>
+    <ds:schemaRef ds:uri="http://purl.org/dc/dcmitype/"/>
     <ds:schemaRef ds:uri="http://schemas.microsoft.com/office/2006/documentManagement/types"/>
+    <ds:schemaRef ds:uri="http://purl.org/dc/elements/1.1/"/>
+    <ds:schemaRef ds:uri="http://schemas.openxmlformats.org/package/2006/metadata/core-properties"/>
     <ds:schemaRef ds:uri="ec38afac-11fd-4f05-b2a5-9d8ac7fc116b"/>
-    <ds:schemaRef ds:uri="http://schemas.openxmlformats.org/package/2006/metadata/core-properties"/>
+    <ds:schemaRef ds:uri="http://schemas.microsoft.com/office/infopath/2007/PartnerControls"/>
     <ds:schemaRef ds:uri="http://purl.org/dc/terms/"/>
-    <ds:schemaRef ds:uri="http://schemas.microsoft.com/office/infopath/2007/PartnerControls"/>
-    <ds:schemaRef ds:uri="http://purl.org/dc/elements/1.1/"/>
-    <ds:schemaRef ds:uri="d1af692f-475c-46b5-a87d-a47813ac8995"/>
     <ds:schemaRef ds:uri="http://schemas.microsoft.com/office/2006/metadata/properties"/>
     <ds:schemaRef ds:uri="http://www.w3.org/XML/1998/namespace"/>
-    <ds:schemaRef ds:uri="http://purl.org/dc/dcmitype/"/>
+    <ds:schemaRef ds:uri="d1af692f-475c-46b5-a87d-a47813ac8995"/>
   </ds:schemaRefs>
 </ds:datastoreItem>
 </file>